--- a/en/slides/08-Computer_Architecture-Boolean_Algebra_1.pptx
+++ b/en/slides/08-Computer_Architecture-Boolean_Algebra_1.pptx
@@ -125,13 +125,13 @@
   <p:extLst>
     <p:ext uri="{521415D9-36F7-43E2-AB2F-B90AF26B5E84}">
       <p14:sectionLst xmlns:p14="http://schemas.microsoft.com/office/powerpoint/2010/main">
-        <p14:section name="Opening" id="{804865cc-b9a0-737b-9b1d-271c575dc85c}">
+        <p14:section name="Opening" id="{5165e519-eb27-2c3a-8a87-f34652b4885c}">
           <p14:sldIdLst>
             <p14:sldId id="256"/>
             <p14:sldId id="257"/>
           </p14:sldIdLst>
         </p14:section>
-        <p14:section name="The computer as a logic machine" id="{aeee6bf2-3e4b-49c6-80c0-915a5cf276bf}">
+        <p14:section name="The computer as a logic machine" id="{925a0a8b-0c15-87b4-c1d3-e65324f9867c}">
           <p14:sldIdLst>
             <p14:sldId id="258"/>
             <p14:sldId id="259"/>
@@ -140,7 +140,7 @@
             <p14:sldId id="262"/>
           </p14:sldIdLst>
         </p14:section>
-        <p14:section name="Boolean algebra" id="{0f510b48-35a1-c8fd-712c-95ffcfd30e4c}">
+        <p14:section name="Boolean algebra" id="{20fd46e5-86d9-6916-2a88-d7e5720f0064}">
           <p14:sldIdLst>
             <p14:sldId id="263"/>
             <p14:sldId id="264"/>
@@ -152,7 +152,7 @@
             <p14:sldId id="270"/>
           </p14:sldIdLst>
         </p14:section>
-        <p14:section name="Back to the machine" id="{3badb0a3-5a5d-70fc-5bcd-154a355b978a}">
+        <p14:section name="Back to the machine" id="{9abadd71-3f9c-7f6b-5bde-4118a9aac9d1}">
           <p14:sldIdLst>
             <p14:sldId id="271"/>
             <p14:sldId id="272"/>
@@ -3198,7 +3198,63 @@
       </p:sp>
       <p:sp>
         <p:nvSpPr>
-          <p:cNvPr id="12" name="Shape 10"/>
+          <p:cNvPr id="12" name="Text 10"/>
+          <p:cNvSpPr txBox="1"/>
+          <p:nvPr/>
+        </p:nvSpPr>
+        <p:spPr>
+          <a:xfrm>
+            <a:off x="4693615" y="566928"/>
+            <a:ext cx="6949440" cy="640080"/>
+          </a:xfrm>
+          <a:prstGeom prst="rect">
+            <a:avLst/>
+          </a:prstGeom>
+          <a:noFill/>
+          <a:ln/>
+        </p:spPr>
+        <p:txBody>
+          <a:bodyPr wrap="square" lIns="0" tIns="0" rIns="0" bIns="0" rtlCol="0" anchor="t"/>
+          <a:lstStyle/>
+          <a:p>
+            <a:pPr algn="r" indent="0" marL="0">
+              <a:buNone/>
+            </a:pPr>
+            <a:r>
+              <a:rPr lang="en-US" sz="1300" dirty="0">
+                <a:solidFill>
+                  <a:srgbClr val="CFE3EA"/>
+                </a:solidFill>
+                <a:latin typeface="Calibri" pitchFamily="34" charset="0"/>
+                <a:ea typeface="Calibri" pitchFamily="34" charset="-122"/>
+                <a:cs typeface="Calibri" pitchFamily="34" charset="-120"/>
+              </a:rPr>
+              <a:t>Lecture deck. The listings, the complete program and how to test it are in the code deck:</a:t>
+            </a:r>
+            <a:endParaRPr lang="en-US" sz="1300" dirty="0"/>
+          </a:p>
+          <a:p>
+            <a:pPr algn="r" indent="0" marL="0">
+              <a:buNone/>
+            </a:pPr>
+            <a:r>
+              <a:rPr lang="en-US" sz="1300" dirty="0">
+                <a:solidFill>
+                  <a:srgbClr val="CFE3EA"/>
+                </a:solidFill>
+                <a:latin typeface="Calibri" pitchFamily="34" charset="0"/>
+                <a:ea typeface="Calibri" pitchFamily="34" charset="-122"/>
+                <a:cs typeface="Calibri" pitchFamily="34" charset="-120"/>
+              </a:rPr>
+              <a:t>08-Computer_Architecture-Boolean_Algebra_1-Code.pptx</a:t>
+            </a:r>
+            <a:endParaRPr lang="en-US" sz="1300" dirty="0"/>
+          </a:p>
+        </p:txBody>
+      </p:sp>
+      <p:sp>
+        <p:nvSpPr>
+          <p:cNvPr id="13" name="Shape 11"/>
           <p:cNvSpPr/>
           <p:nvPr/>
         </p:nvSpPr>
@@ -3225,7 +3281,7 @@
       </p:sp>
       <p:pic>
         <p:nvPicPr>
-          <p:cNvPr id="13" name="Image 0" descr="/Users/raffaelemontella/devel/riscv-prg32/computer-architecture-with-prg32/tools/assets/lab2_step1_lamps.png">    </p:cNvPr>
+          <p:cNvPr id="14" name="Image 0" descr="/Users/raffaelemontella/devel/riscv-prg32/computer-architecture-with-prg32/tools/assets/lab2_step1_lamps.png">    </p:cNvPr>
           <p:cNvPicPr>
             <a:picLocks noChangeAspect="1"/>
           </p:cNvPicPr>

--- a/en/slides/08-Computer_Architecture-Boolean_Algebra_1.pptx
+++ b/en/slides/08-Computer_Architecture-Boolean_Algebra_1.pptx
@@ -125,13 +125,13 @@
   <p:extLst>
     <p:ext uri="{521415D9-36F7-43E2-AB2F-B90AF26B5E84}">
       <p14:sectionLst xmlns:p14="http://schemas.microsoft.com/office/powerpoint/2010/main">
-        <p14:section name="Opening" id="{5165e519-eb27-2c3a-8a87-f34652b4885c}">
+        <p14:section name="Opening" id="{65e9965c-2d7d-b8d1-05c8-0c8501977adb}">
           <p14:sldIdLst>
             <p14:sldId id="256"/>
             <p14:sldId id="257"/>
           </p14:sldIdLst>
         </p14:section>
-        <p14:section name="The computer as a logic machine" id="{925a0a8b-0c15-87b4-c1d3-e65324f9867c}">
+        <p14:section name="The computer as a logic machine" id="{2ff6de32-1c9c-774a-8614-a6132d311065}">
           <p14:sldIdLst>
             <p14:sldId id="258"/>
             <p14:sldId id="259"/>
@@ -140,7 +140,7 @@
             <p14:sldId id="262"/>
           </p14:sldIdLst>
         </p14:section>
-        <p14:section name="Boolean algebra" id="{20fd46e5-86d9-6916-2a88-d7e5720f0064}">
+        <p14:section name="Boolean algebra" id="{5c33655b-1dcc-6ba7-2710-393e5f67dfc3}">
           <p14:sldIdLst>
             <p14:sldId id="263"/>
             <p14:sldId id="264"/>
@@ -152,7 +152,7 @@
             <p14:sldId id="270"/>
           </p14:sldIdLst>
         </p14:section>
-        <p14:section name="Back to the machine" id="{9abadd71-3f9c-7f6b-5bde-4118a9aac9d1}">
+        <p14:section name="Back to the machine" id="{e21425e4-9a82-071f-3874-b1f907948fb5}">
           <p14:sldIdLst>
             <p14:sldId id="271"/>
             <p14:sldId id="272"/>
@@ -565,6 +565,8 @@
             <a:r>
               <a:rPr lang="en-US" dirty="0"/>
               <a:t>The second block of the course begins: logic. After learning what bits mean, you learn how they are combined. You have in fact been using Boolean algebra since the first days, every time you tested a button with andi; this lecture gives that operation a name and builds the algebra around it. The White Rabbit on the cover is always in a hurry: the processor too does everything by tiny logical steps, billions of them per second.
+Learning status: UNDERSTAND NOW, by the end of this lecture you explain it, trace it and apply it on your own; USE NOW, you follow and use the recipe today; how it works inside is explained later, or is not part of the course; UNDERSTAND LATER, recognise the name and what it is for; a later lecture explains it. A slide without a badge is context: a story, an example, a question, an exercise.
+Learning status of this lecture. UNDERSTAND NOW: bit masks; the von Neumann architecture; analysis and synthesis; Boolean algebra; logic gates. USE NOW: the complete program, the PRG32 tools (used, not studied, in this course). UNDERSTAND LATER: minimisation, Karnaugh maps (Lecture 09). A slide without a badge is context: a story, an example, a question, an exercise.
 For the lecturer: Spiral: the students have used andi to test a button since the first days. The lecture names what they did (a mask is an AND), then builds the algebra, then returns to the bitwise instructions.</a:t>
             </a:r>
             <a:endParaRPr lang="en-US" dirty="0"/>
@@ -654,6 +656,7 @@
             <a:r>
               <a:rPr lang="en-US" dirty="0"/>
               <a:t>Three more gates. XOR, the exclusive or, gives 1 when the two inputs are different: it is the sum bit of a one-bit addition. NAND and NOR are AND and OR followed by a negation: the small circle on the output of a symbol always means NOT. NAND gives 0 only when both inputs are 1; NOR gives 1 only when both are 0. They matter in practice because they are the gates that are cheapest to build with transistors, as Lecture 10 will show.
+UNDERSTAND NOW: logic gates.
 For the lecturer: New slide. XOR is 1 when the inputs differ: it is the sum bit of an addition, and RISC-V has it as an instruction. The small circle on a symbol means negation.</a:t>
             </a:r>
             <a:endParaRPr lang="en-US" dirty="0"/>
@@ -743,6 +746,7 @@
             <a:r>
               <a:rPr lang="en-US" dirty="0"/>
               <a:t>The first four properties, each in two forms, one for AND and one for OR. Commutative and associative are as in ordinary algebra; thanks to the second, AND and OR extend to any number of operands. Idempotence is new: x AND x is x, and x OR x is x; repeating a variable adds nothing. Absorption is the most useful for simplifying: x OR (x AND y) is simply x, because when x is 1 the result is 1 whatever y is, and when x is 0 both terms are 0.
+UNDERSTAND NOW: Boolean algebra.
 For the lecturer: Because of the associative property AND and OR can be defined on more than two operands: x . y . z. Every property comes in a pair: swap AND with OR.</a:t>
             </a:r>
             <a:endParaRPr lang="en-US" dirty="0"/>
@@ -832,6 +836,7 @@
             <a:r>
               <a:rPr lang="en-US" dirty="0"/>
               <a:t>Five more properties. The first distributive law is the familiar one. The second, x + yz = (x + y)(x + z), has no equivalent in ordinary algebra: here OR distributes over AND too. Then the constants: 1 is the identity for AND and 0 for OR; 0 annuls an AND and 1 saturates an OR. The complement laws say that a variable and its negation give 0 with AND and 1 with OR. Involution: negating twice returns the variable. Two of these, identity and null element, explain how a mask works.
+UNDERSTAND NOW: Boolean algebra.
 For the lecturer: The second distributive law has no counterpart in ordinary algebra. The source slide called involution 'convoluzione' and grouped identity and null element as 'minimum and maximum'; the complement laws are added here.</a:t>
             </a:r>
             <a:endParaRPr lang="en-US" dirty="0"/>
@@ -921,6 +926,7 @@
             <a:r>
               <a:rPr lang="en-US" dirty="0"/>
               <a:t>De Morgan's laws connect the three operations: the complement of a product is the sum of the complements, and the complement of a sum is the product of the complements. The table proves the first by perfect induction: since the variables have only two values, a law can be verified by checking every row. The two highlighted columns are identical. In terms of gates: a NAND is an OR with negated inputs. You will use these laws constantly, on paper and in programs.
+UNDERSTAND NOW: Boolean algebra.
 For the lecturer: Augustus De Morgan, 1847. The laws generalise to any number of variables. The source deck showed the proof as a picture.</a:t>
             </a:r>
             <a:endParaRPr lang="en-US" dirty="0"/>
@@ -1010,6 +1016,7 @@
             <a:r>
               <a:rPr lang="en-US" dirty="0"/>
               <a:t>Two general rules. Duality: every identity remains true if you swap AND with OR and 0 with 1; this is why the properties came in pairs, and it halves the work of proving them. Precedence: NOT is applied first, then AND, then OR, as powers come before products and products before sums; parentheses change the order. And a definition to remember: two expressions are equivalent when they have the same truth table.
+UNDERSTAND NOW: Boolean algebra.
 For the lecturer: Duality halves the work: prove one law of each pair and the other follows.</a:t>
             </a:r>
             <a:endParaRPr lang="en-US" dirty="0"/>
@@ -1099,6 +1106,7 @@
             <a:r>
               <a:rPr lang="en-US" dirty="0"/>
               <a:t>The algebra at work. The expression xy + xy' needs two AND gates, an OR and an inverter. Collecting x with the distributive law gives x(y + y'); the complement law turns the parenthesis into 1; the identity law leaves x. Three gates have become a piece of wire. Each line of the table names the law that justifies it: when you simplify, always be able to say which law you are applying. The caption shows a second simplification that will be used again.
+UNDERSTAND NOW: Boolean algebra.
 For the lecturer: Two literals and three gates become a wire. The identity in the caption (sometimes called the simplification theorem) uses the distributive law of OR over AND; it is used again in Lecture 09.</a:t>
             </a:r>
             <a:endParaRPr lang="en-US" dirty="0"/>
@@ -1458,6 +1466,7 @@
             <a:r>
               <a:rPr lang="en-US" dirty="0"/>
               <a:t>Four conclusions. The von Neumann architecture describes a real machine in simplified form. Boolean algebra describes logic functions that electronic circuits can implement. Three operations, a few properties and De Morgan's laws are enough to transform any expression. And a bitwise instruction is the algebra applied to thirty-two bits at once, with the mask as the identity law at work. The next lecture goes from operators to functions: canonical forms and minimisation.
+Learning status, recap. UNDERSTAND NOW: bit masks; the von Neumann architecture; analysis and synthesis; Boolean algebra; logic gates. USE NOW: the complete program, the PRG32 tools (used, not studied, in this course). UNDERSTAND LATER: minimisation, Karnaugh maps (Lecture 09). A slide without a badge is context: a story, an example, a question, an exercise.
 For the lecturer: Next lecture: Boolean functions, canonical forms and minimisation.</a:t>
             </a:r>
             <a:endParaRPr lang="en-US" dirty="0"/>
@@ -1635,6 +1644,7 @@
             <a:r>
               <a:rPr lang="en-US" dirty="0"/>
               <a:t>A computer has three subsystems: the processor, which executes instructions; the main memory, which holds instructions and data; and input/output, which connects the machine to the world. They are joined by a bus, a set of shared wires divided into address lines, data lines and control lines. It is the von Neumann model of Lecture 03 in today's terms. Everything that travels on the bus is a pattern of bits. On the ESP32-C6 all of this is inside one chip.
+UNDERSTAND NOW: the von Neumann architecture.
 For the lecturer: Replaces the two pictures of the source deck (von Neumann model; architecture with bus). On the ESP32-C6 the three subsystems and the bus are all inside one chip.</a:t>
             </a:r>
             <a:endParaRPr lang="en-US" dirty="0"/>
@@ -1724,6 +1734,7 @@
             <a:r>
               <a:rPr lang="en-US" dirty="0"/>
               <a:t>The processor is where the processing capability resides. It executes instructions, which are explicit commands of two kinds: those that govern the transfer of information, inside the computer and to and from the devices, and those that specify arithmetic and logic operations. The memory holds the data and the sequence of instructions, and a sequence of instructions stored in memory is a program. The processor does one thing for ever: it fetches an instruction, executes it, and repeats.
+UNDERSTAND NOW: the von Neumann architecture.
 For the lecturer: RV32I: about forty instructions. You have used addi, lw, sw, andi, beqz, call and ret: transfer, arithmetic, logic and control are all there.</a:t>
             </a:r>
             <a:endParaRPr lang="en-US" dirty="0"/>
@@ -1812,7 +1823,8 @@
           <a:p>
             <a:r>
               <a:rPr lang="en-US" dirty="0"/>
-              <a:t>Four adjectives define an electronic computer. Numeric, or digital: all the information is strings of bits. Automatic: once started it proceeds by itself. Stored-program: the program is in memory and can be replaced, so the same machine does different jobs. Electronic: it is built from circuits that store and process bits. Each adjective excludes something: an abacus is numeric but not automatic; a mechanical music box is automatic but its program is fixed.</a:t>
+              <a:t>Four adjectives define an electronic computer. Numeric, or digital: all the information is strings of bits. Automatic: once started it proceeds by itself. Stored-program: the program is in memory and can be replaced, so the same machine does different jobs. Electronic: it is built from circuits that store and process bits. Each adjective excludes something: an abacus is numeric but not automatic; a mechanical music box is automatic but its program is fixed.
+UNDERSTAND NOW: the von Neumann architecture.</a:t>
             </a:r>
             <a:endParaRPr lang="en-US" dirty="0"/>
           </a:p>
@@ -1901,6 +1913,7 @@
             <a:r>
               <a:rPr lang="en-US" dirty="0"/>
               <a:t>The circuits that store and process bits are called switching circuits, or logic circuits; connected together they form a switching network, and designing one is logic design. To describe what such circuits do we use an algebra. It plays for circuits the role that ordinary algebra plays for quantities: a notation in which you can calculate instead of trying every case. The values are two, 0 and 1: two voltage levels, two states of a switch.
+UNDERSTAND NOW: analysis and synthesis.
 For the lecturer: Switching circuits: circuiti di commutazione. The algebra is Boole's (1854), applied to switches by Nakajima and Shannon in the 1930s (Lecture 03).</a:t>
             </a:r>
             <a:endParaRPr lang="en-US" dirty="0"/>
@@ -1990,6 +2003,7 @@
             <a:r>
               <a:rPr lang="en-US" dirty="0"/>
               <a:t>Two problems, and one algebra for both. Analysis: you are given the structure of a circuit, how it is made, and you must find its behaviour, what it does. Reading andi t3, t0, 1 and saying what ends up in t3 is analysis. Synthesis goes the other way: from a desired behaviour to a structure that realises it, for example from the table of a sum to an adder. Synthesis usually has many solutions; choosing the cheapest is the subject of the next lecture.
+UNDERSTAND NOW: analysis and synthesis. UNDERSTAND LATER: minimisation, Karnaugh maps (studied in Lecture 09).
 For the lecturer: Synthesis usually has many solutions; choosing the cheapest is the minimisation problem of Lecture 09.</a:t>
             </a:r>
             <a:endParaRPr lang="en-US" dirty="0"/>
@@ -2079,6 +2093,7 @@
             <a:r>
               <a:rPr lang="en-US" dirty="0"/>
               <a:t>In Boolean algebra a variable can take only two values, 0 and 1, and there are three basic operations. AND, the logical product, written with a dot or by simply putting the variables side by side. OR, the logical sum, written with a plus sign. NOT, the complement, written here with a prime, as in x', so that it can be typed. Do not be misled by the symbols: the plus is not an arithmetic sum, as you will see at once in the truth table of OR.
+UNDERSTAND NOW: Boolean algebra.
 For the lecturer: Conjunction, disjunction, negation: congiunzione, disgiunzione, negazione. In these slides the complement is written with a prime (x') so that it can be typed.</a:t>
             </a:r>
             <a:endParaRPr lang="en-US" dirty="0"/>
@@ -2168,6 +2183,7 @@
             <a:r>
               <a:rPr lang="en-US" dirty="0"/>
               <a:t>Each panel shows an operation in three ways: the symbol of the gate, the notation and the truth table, which lists the output for every combination of the inputs. AND gives 1 only when both inputs are 1. OR gives 0 only when both inputs are 0, so 1 OR 1 is 1, not 2. NOT has one input and inverts it. Learn the three shapes: a flat back and a round front for AND, a curved back and a pointed front for OR, a triangle with a small circle for NOT.
+UNDERSTAND NOW: logic gates.
 For the lecturer: AND is 1 only when both inputs are 1; OR is 0 only when both inputs are 0; NOT inverts. A truth table lists the output for every combination of the inputs.</a:t>
             </a:r>
             <a:endParaRPr lang="en-US" dirty="0"/>
@@ -3305,6 +3321,420 @@
       </p:pic>
       <p:sp>
         <p:nvSpPr>
+          <p:cNvPr id="15" name="Shape 12"/>
+          <p:cNvSpPr/>
+          <p:nvPr/>
+        </p:nvSpPr>
+        <p:spPr>
+          <a:xfrm>
+            <a:off x="9690303" y="91440"/>
+            <a:ext cx="1952752" cy="274320"/>
+          </a:xfrm>
+          <a:prstGeom prst="rect">
+            <a:avLst/>
+          </a:prstGeom>
+          <a:solidFill>
+            <a:srgbClr val="F3E8FF"/>
+          </a:solidFill>
+          <a:ln w="12700">
+            <a:solidFill>
+              <a:srgbClr val="7E22CE"/>
+            </a:solidFill>
+            <a:prstDash val="dash"/>
+          </a:ln>
+        </p:spPr>
+      </p:sp>
+      <p:sp>
+        <p:nvSpPr>
+          <p:cNvPr id="16" name="Shape 13"/>
+          <p:cNvSpPr/>
+          <p:nvPr/>
+        </p:nvSpPr>
+        <p:spPr>
+          <a:xfrm>
+            <a:off x="9717735" y="128016"/>
+            <a:ext cx="45720" cy="45720"/>
+          </a:xfrm>
+          <a:prstGeom prst="rect">
+            <a:avLst/>
+          </a:prstGeom>
+          <a:solidFill>
+            <a:srgbClr val="7E22CE"/>
+          </a:solidFill>
+          <a:ln w="12700">
+            <a:solidFill>
+              <a:srgbClr val="7E22CE"/>
+            </a:solidFill>
+            <a:prstDash val="solid"/>
+          </a:ln>
+        </p:spPr>
+      </p:sp>
+      <p:sp>
+        <p:nvSpPr>
+          <p:cNvPr id="17" name="Shape 14"/>
+          <p:cNvSpPr/>
+          <p:nvPr/>
+        </p:nvSpPr>
+        <p:spPr>
+          <a:xfrm>
+            <a:off x="9717735" y="205740"/>
+            <a:ext cx="45720" cy="45720"/>
+          </a:xfrm>
+          <a:prstGeom prst="rect">
+            <a:avLst/>
+          </a:prstGeom>
+          <a:solidFill>
+            <a:srgbClr val="7E22CE"/>
+          </a:solidFill>
+          <a:ln w="12700">
+            <a:solidFill>
+              <a:srgbClr val="7E22CE"/>
+            </a:solidFill>
+            <a:prstDash val="solid"/>
+          </a:ln>
+        </p:spPr>
+      </p:sp>
+      <p:sp>
+        <p:nvSpPr>
+          <p:cNvPr id="18" name="Shape 15"/>
+          <p:cNvSpPr/>
+          <p:nvPr/>
+        </p:nvSpPr>
+        <p:spPr>
+          <a:xfrm>
+            <a:off x="9717735" y="283464"/>
+            <a:ext cx="45720" cy="45720"/>
+          </a:xfrm>
+          <a:prstGeom prst="rect">
+            <a:avLst/>
+          </a:prstGeom>
+          <a:solidFill>
+            <a:srgbClr val="7E22CE"/>
+          </a:solidFill>
+          <a:ln w="12700">
+            <a:solidFill>
+              <a:srgbClr val="7E22CE"/>
+            </a:solidFill>
+            <a:prstDash val="solid"/>
+          </a:ln>
+        </p:spPr>
+      </p:sp>
+      <p:pic>
+        <p:nvPicPr>
+          <p:cNvPr id="19" name="Image 1" descr="preencoded.png">    </p:cNvPr>
+          <p:cNvPicPr>
+            <a:picLocks noChangeAspect="1"/>
+          </p:cNvPicPr>
+          <p:nvPr/>
+        </p:nvPicPr>
+        <p:blipFill>
+          <a:blip r:embed="rId2"/>
+          <a:stretch>
+            <a:fillRect/>
+          </a:stretch>
+        </p:blipFill>
+        <p:spPr>
+          <a:xfrm>
+            <a:off x="9818319" y="128016"/>
+            <a:ext cx="201168" cy="201168"/>
+          </a:xfrm>
+          <a:prstGeom prst="rect">
+            <a:avLst/>
+          </a:prstGeom>
+        </p:spPr>
+      </p:pic>
+      <p:sp>
+        <p:nvSpPr>
+          <p:cNvPr id="20" name="Text 16"/>
+          <p:cNvSpPr txBox="1"/>
+          <p:nvPr/>
+        </p:nvSpPr>
+        <p:spPr>
+          <a:xfrm>
+            <a:off x="10074351" y="91440"/>
+            <a:ext cx="1532128" cy="274320"/>
+          </a:xfrm>
+          <a:prstGeom prst="rect">
+            <a:avLst/>
+          </a:prstGeom>
+          <a:noFill/>
+          <a:ln/>
+        </p:spPr>
+        <p:txBody>
+          <a:bodyPr wrap="square" lIns="0" tIns="0" rIns="0" bIns="0" rtlCol="0" anchor="ctr"/>
+          <a:lstStyle/>
+          <a:p>
+            <a:pPr indent="0" marL="0">
+              <a:buNone/>
+            </a:pPr>
+            <a:r>
+              <a:rPr lang="en-US" sz="1100" b="1" dirty="0">
+                <a:solidFill>
+                  <a:srgbClr val="6B21A8"/>
+                </a:solidFill>
+                <a:latin typeface="Calibri" pitchFamily="34" charset="0"/>
+                <a:ea typeface="Calibri" pitchFamily="34" charset="-122"/>
+                <a:cs typeface="Calibri" pitchFamily="34" charset="-120"/>
+              </a:rPr>
+              <a:t>UNDERSTAND LATER</a:t>
+            </a:r>
+            <a:endParaRPr lang="en-US" sz="1100" dirty="0"/>
+          </a:p>
+        </p:txBody>
+      </p:sp>
+      <p:sp>
+        <p:nvSpPr>
+          <p:cNvPr id="21" name="Shape 17"/>
+          <p:cNvSpPr/>
+          <p:nvPr/>
+        </p:nvSpPr>
+        <p:spPr>
+          <a:xfrm>
+            <a:off x="8407349" y="91440"/>
+            <a:ext cx="1173226" cy="274320"/>
+          </a:xfrm>
+          <a:prstGeom prst="rect">
+            <a:avLst/>
+          </a:prstGeom>
+          <a:solidFill>
+            <a:srgbClr val="FEF3C7"/>
+          </a:solidFill>
+          <a:ln w="12700">
+            <a:solidFill>
+              <a:srgbClr val="B45309"/>
+            </a:solidFill>
+            <a:prstDash val="solid"/>
+          </a:ln>
+        </p:spPr>
+      </p:sp>
+      <p:sp>
+        <p:nvSpPr>
+          <p:cNvPr id="22" name="Shape 18"/>
+          <p:cNvSpPr/>
+          <p:nvPr/>
+        </p:nvSpPr>
+        <p:spPr>
+          <a:xfrm>
+            <a:off x="8407349" y="91440"/>
+            <a:ext cx="27432" cy="274320"/>
+          </a:xfrm>
+          <a:prstGeom prst="rect">
+            <a:avLst/>
+          </a:prstGeom>
+          <a:solidFill>
+            <a:srgbClr val="B45309"/>
+          </a:solidFill>
+          <a:ln w="12700">
+            <a:solidFill>
+              <a:srgbClr val="B45309"/>
+            </a:solidFill>
+            <a:prstDash val="solid"/>
+          </a:ln>
+        </p:spPr>
+      </p:sp>
+      <p:sp>
+        <p:nvSpPr>
+          <p:cNvPr id="23" name="Shape 19"/>
+          <p:cNvSpPr/>
+          <p:nvPr/>
+        </p:nvSpPr>
+        <p:spPr>
+          <a:xfrm>
+            <a:off x="8462213" y="91440"/>
+            <a:ext cx="27432" cy="274320"/>
+          </a:xfrm>
+          <a:prstGeom prst="rect">
+            <a:avLst/>
+          </a:prstGeom>
+          <a:solidFill>
+            <a:srgbClr val="B45309"/>
+          </a:solidFill>
+          <a:ln w="12700">
+            <a:solidFill>
+              <a:srgbClr val="B45309"/>
+            </a:solidFill>
+            <a:prstDash val="solid"/>
+          </a:ln>
+        </p:spPr>
+      </p:sp>
+      <p:pic>
+        <p:nvPicPr>
+          <p:cNvPr id="24" name="Image 2" descr="preencoded.png">    </p:cNvPr>
+          <p:cNvPicPr>
+            <a:picLocks noChangeAspect="1"/>
+          </p:cNvPicPr>
+          <p:nvPr/>
+        </p:nvPicPr>
+        <p:blipFill>
+          <a:blip r:embed="rId3"/>
+          <a:stretch>
+            <a:fillRect/>
+          </a:stretch>
+        </p:blipFill>
+        <p:spPr>
+          <a:xfrm>
+            <a:off x="8535365" y="128016"/>
+            <a:ext cx="201168" cy="201168"/>
+          </a:xfrm>
+          <a:prstGeom prst="rect">
+            <a:avLst/>
+          </a:prstGeom>
+        </p:spPr>
+      </p:pic>
+      <p:sp>
+        <p:nvSpPr>
+          <p:cNvPr id="25" name="Text 20"/>
+          <p:cNvSpPr txBox="1"/>
+          <p:nvPr/>
+        </p:nvSpPr>
+        <p:spPr>
+          <a:xfrm>
+            <a:off x="8791397" y="91440"/>
+            <a:ext cx="752602" cy="274320"/>
+          </a:xfrm>
+          <a:prstGeom prst="rect">
+            <a:avLst/>
+          </a:prstGeom>
+          <a:noFill/>
+          <a:ln/>
+        </p:spPr>
+        <p:txBody>
+          <a:bodyPr wrap="square" lIns="0" tIns="0" rIns="0" bIns="0" rtlCol="0" anchor="ctr"/>
+          <a:lstStyle/>
+          <a:p>
+            <a:pPr indent="0" marL="0">
+              <a:buNone/>
+            </a:pPr>
+            <a:r>
+              <a:rPr lang="en-US" sz="1100" b="1" dirty="0">
+                <a:solidFill>
+                  <a:srgbClr val="92400E"/>
+                </a:solidFill>
+                <a:latin typeface="Calibri" pitchFamily="34" charset="0"/>
+                <a:ea typeface="Calibri" pitchFamily="34" charset="-122"/>
+                <a:cs typeface="Calibri" pitchFamily="34" charset="-120"/>
+              </a:rPr>
+              <a:t>USE NOW</a:t>
+            </a:r>
+            <a:endParaRPr lang="en-US" sz="1100" dirty="0"/>
+          </a:p>
+        </p:txBody>
+      </p:sp>
+      <p:sp>
+        <p:nvSpPr>
+          <p:cNvPr id="26" name="Shape 21"/>
+          <p:cNvSpPr/>
+          <p:nvPr/>
+        </p:nvSpPr>
+        <p:spPr>
+          <a:xfrm>
+            <a:off x="6518097" y="91440"/>
+            <a:ext cx="1779524" cy="274320"/>
+          </a:xfrm>
+          <a:prstGeom prst="rect">
+            <a:avLst/>
+          </a:prstGeom>
+          <a:solidFill>
+            <a:srgbClr val="E0F2FE"/>
+          </a:solidFill>
+          <a:ln w="12700">
+            <a:solidFill>
+              <a:srgbClr val="0369A1"/>
+            </a:solidFill>
+            <a:prstDash val="solid"/>
+          </a:ln>
+        </p:spPr>
+      </p:sp>
+      <p:sp>
+        <p:nvSpPr>
+          <p:cNvPr id="27" name="Shape 22"/>
+          <p:cNvSpPr/>
+          <p:nvPr/>
+        </p:nvSpPr>
+        <p:spPr>
+          <a:xfrm>
+            <a:off x="6518097" y="91440"/>
+            <a:ext cx="73152" cy="274320"/>
+          </a:xfrm>
+          <a:prstGeom prst="rect">
+            <a:avLst/>
+          </a:prstGeom>
+          <a:solidFill>
+            <a:srgbClr val="0369A1"/>
+          </a:solidFill>
+          <a:ln w="12700">
+            <a:solidFill>
+              <a:srgbClr val="0369A1"/>
+            </a:solidFill>
+            <a:prstDash val="solid"/>
+          </a:ln>
+        </p:spPr>
+      </p:sp>
+      <p:pic>
+        <p:nvPicPr>
+          <p:cNvPr id="28" name="Image 3" descr="preencoded.png">    </p:cNvPr>
+          <p:cNvPicPr>
+            <a:picLocks noChangeAspect="1"/>
+          </p:cNvPicPr>
+          <p:nvPr/>
+        </p:nvPicPr>
+        <p:blipFill>
+          <a:blip r:embed="rId4"/>
+          <a:stretch>
+            <a:fillRect/>
+          </a:stretch>
+        </p:blipFill>
+        <p:spPr>
+          <a:xfrm>
+            <a:off x="6646113" y="128016"/>
+            <a:ext cx="201168" cy="201168"/>
+          </a:xfrm>
+          <a:prstGeom prst="rect">
+            <a:avLst/>
+          </a:prstGeom>
+        </p:spPr>
+      </p:pic>
+      <p:sp>
+        <p:nvSpPr>
+          <p:cNvPr id="29" name="Text 23"/>
+          <p:cNvSpPr txBox="1"/>
+          <p:nvPr/>
+        </p:nvSpPr>
+        <p:spPr>
+          <a:xfrm>
+            <a:off x="6902145" y="91440"/>
+            <a:ext cx="1358900" cy="274320"/>
+          </a:xfrm>
+          <a:prstGeom prst="rect">
+            <a:avLst/>
+          </a:prstGeom>
+          <a:noFill/>
+          <a:ln/>
+        </p:spPr>
+        <p:txBody>
+          <a:bodyPr wrap="square" lIns="0" tIns="0" rIns="0" bIns="0" rtlCol="0" anchor="ctr"/>
+          <a:lstStyle/>
+          <a:p>
+            <a:pPr indent="0" marL="0">
+              <a:buNone/>
+            </a:pPr>
+            <a:r>
+              <a:rPr lang="en-US" sz="1100" b="1" dirty="0">
+                <a:solidFill>
+                  <a:srgbClr val="075985"/>
+                </a:solidFill>
+                <a:latin typeface="Calibri" pitchFamily="34" charset="0"/>
+                <a:ea typeface="Calibri" pitchFamily="34" charset="-122"/>
+                <a:cs typeface="Calibri" pitchFamily="34" charset="-120"/>
+              </a:rPr>
+              <a:t>UNDERSTAND NOW</a:t>
+            </a:r>
+            <a:endParaRPr lang="en-US" sz="1100" dirty="0"/>
+          </a:p>
+        </p:txBody>
+      </p:sp>
+      <p:sp>
+        <p:nvSpPr>
           <p:cNvPr id="25" name="Slide Number Placeholder 0"/>
           <p:cNvSpPr>
             <a:spLocks noGrp="1"/>
@@ -3491,9 +3921,59 @@
           </a:p>
         </p:txBody>
       </p:sp>
+      <p:sp>
+        <p:nvSpPr>
+          <p:cNvPr id="5" name="Shape 3"/>
+          <p:cNvSpPr/>
+          <p:nvPr/>
+        </p:nvSpPr>
+        <p:spPr>
+          <a:xfrm>
+            <a:off x="8944305" y="91440"/>
+            <a:ext cx="2698750" cy="274320"/>
+          </a:xfrm>
+          <a:prstGeom prst="rect">
+            <a:avLst/>
+          </a:prstGeom>
+          <a:solidFill>
+            <a:srgbClr val="E0F2FE"/>
+          </a:solidFill>
+          <a:ln w="12700">
+            <a:solidFill>
+              <a:srgbClr val="0369A1"/>
+            </a:solidFill>
+            <a:prstDash val="solid"/>
+          </a:ln>
+        </p:spPr>
+      </p:sp>
+      <p:sp>
+        <p:nvSpPr>
+          <p:cNvPr id="6" name="Shape 4"/>
+          <p:cNvSpPr/>
+          <p:nvPr/>
+        </p:nvSpPr>
+        <p:spPr>
+          <a:xfrm>
+            <a:off x="8944305" y="91440"/>
+            <a:ext cx="73152" cy="274320"/>
+          </a:xfrm>
+          <a:prstGeom prst="rect">
+            <a:avLst/>
+          </a:prstGeom>
+          <a:solidFill>
+            <a:srgbClr val="0369A1"/>
+          </a:solidFill>
+          <a:ln w="12700">
+            <a:solidFill>
+              <a:srgbClr val="0369A1"/>
+            </a:solidFill>
+            <a:prstDash val="solid"/>
+          </a:ln>
+        </p:spPr>
+      </p:sp>
       <p:pic>
         <p:nvPicPr>
-          <p:cNvPr id="6" name="Image 0" descr="preencoded.png">    </p:cNvPr>
+          <p:cNvPr id="7" name="Image 0" descr="preencoded.png">    </p:cNvPr>
           <p:cNvPicPr>
             <a:picLocks noChangeAspect="1"/>
           </p:cNvPicPr>
@@ -3507,6 +3987,83 @@
         </p:blipFill>
         <p:spPr>
           <a:xfrm>
+            <a:off x="9072321" y="128016"/>
+            <a:ext cx="201168" cy="201168"/>
+          </a:xfrm>
+          <a:prstGeom prst="rect">
+            <a:avLst/>
+          </a:prstGeom>
+        </p:spPr>
+      </p:pic>
+      <p:sp>
+        <p:nvSpPr>
+          <p:cNvPr id="8" name="Text 5"/>
+          <p:cNvSpPr txBox="1"/>
+          <p:nvPr/>
+        </p:nvSpPr>
+        <p:spPr>
+          <a:xfrm>
+            <a:off x="9328353" y="91440"/>
+            <a:ext cx="2278126" cy="274320"/>
+          </a:xfrm>
+          <a:prstGeom prst="rect">
+            <a:avLst/>
+          </a:prstGeom>
+          <a:noFill/>
+          <a:ln/>
+        </p:spPr>
+        <p:txBody>
+          <a:bodyPr wrap="square" lIns="0" tIns="0" rIns="0" bIns="0" rtlCol="0" anchor="ctr"/>
+          <a:lstStyle/>
+          <a:p>
+            <a:pPr indent="0" marL="0">
+              <a:buNone/>
+            </a:pPr>
+            <a:r>
+              <a:rPr lang="en-US" sz="1100" b="1" dirty="0">
+                <a:solidFill>
+                  <a:srgbClr val="075985"/>
+                </a:solidFill>
+                <a:latin typeface="Calibri" pitchFamily="34" charset="0"/>
+                <a:ea typeface="Calibri" pitchFamily="34" charset="-122"/>
+                <a:cs typeface="Calibri" pitchFamily="34" charset="-120"/>
+              </a:rPr>
+              <a:t>UNDERSTAND NOW</a:t>
+            </a:r>
+            <a:pPr indent="0" marL="0">
+              <a:buNone/>
+            </a:pPr>
+            <a:r>
+              <a:rPr lang="en-US" sz="1100" dirty="0">
+                <a:solidFill>
+                  <a:srgbClr val="075985"/>
+                </a:solidFill>
+                <a:latin typeface="Calibri" pitchFamily="34" charset="0"/>
+                <a:ea typeface="Calibri" pitchFamily="34" charset="-122"/>
+                <a:cs typeface="Calibri" pitchFamily="34" charset="-120"/>
+              </a:rPr>
+              <a:t> · logic gates</a:t>
+            </a:r>
+            <a:endParaRPr lang="en-US" sz="1100" dirty="0"/>
+          </a:p>
+        </p:txBody>
+      </p:sp>
+      <p:pic>
+        <p:nvPicPr>
+          <p:cNvPr id="10" name="Image 1" descr="preencoded.png">    </p:cNvPr>
+          <p:cNvPicPr>
+            <a:picLocks noChangeAspect="1"/>
+          </p:cNvPicPr>
+          <p:nvPr/>
+        </p:nvPicPr>
+        <p:blipFill>
+          <a:blip r:embed="rId2"/>
+          <a:stretch>
+            <a:fillRect/>
+          </a:stretch>
+        </p:blipFill>
+        <p:spPr>
+          <a:xfrm>
             <a:off x="822960" y="2236278"/>
             <a:ext cx="2966618" cy="830964"/>
           </a:xfrm>
@@ -3517,7 +4074,7 @@
       </p:pic>
       <p:sp>
         <p:nvSpPr>
-          <p:cNvPr id="7" name="Text 3"/>
+          <p:cNvPr id="11" name="Text 6"/>
           <p:cNvSpPr txBox="1"/>
           <p:nvPr/>
         </p:nvSpPr>
@@ -4617,7 +5174,7 @@
       </p:graphicFrame>
       <p:sp>
         <p:nvSpPr>
-          <p:cNvPr id="9" name="Shape 4"/>
+          <p:cNvPr id="13" name="Shape 7"/>
           <p:cNvSpPr/>
           <p:nvPr/>
         </p:nvSpPr>
@@ -4644,7 +5201,7 @@
       </p:sp>
       <p:sp>
         <p:nvSpPr>
-          <p:cNvPr id="10" name="Text 5"/>
+          <p:cNvPr id="14" name="Text 8"/>
           <p:cNvSpPr txBox="1"/>
           <p:nvPr/>
         </p:nvSpPr>
@@ -4691,14 +5248,14 @@
       </p:sp>
       <p:pic>
         <p:nvPicPr>
-          <p:cNvPr id="11" name="Image 1" descr="preencoded.png">    </p:cNvPr>
+          <p:cNvPr id="15" name="Image 2" descr="preencoded.png">    </p:cNvPr>
           <p:cNvPicPr>
             <a:picLocks noChangeAspect="1"/>
           </p:cNvPicPr>
           <p:nvPr/>
         </p:nvPicPr>
         <p:blipFill>
-          <a:blip r:embed="rId2"/>
+          <a:blip r:embed="rId3"/>
           <a:stretch>
             <a:fillRect/>
           </a:stretch>
@@ -4715,7 +5272,7 @@
       </p:pic>
       <p:sp>
         <p:nvSpPr>
-          <p:cNvPr id="12" name="Text 6"/>
+          <p:cNvPr id="16" name="Text 9"/>
           <p:cNvSpPr txBox="1"/>
           <p:nvPr/>
         </p:nvSpPr>
@@ -5815,7 +6372,7 @@
       </p:graphicFrame>
       <p:sp>
         <p:nvSpPr>
-          <p:cNvPr id="14" name="Shape 7"/>
+          <p:cNvPr id="18" name="Shape 10"/>
           <p:cNvSpPr/>
           <p:nvPr/>
         </p:nvSpPr>
@@ -5842,7 +6399,7 @@
       </p:sp>
       <p:sp>
         <p:nvSpPr>
-          <p:cNvPr id="15" name="Text 8"/>
+          <p:cNvPr id="19" name="Text 11"/>
           <p:cNvSpPr txBox="1"/>
           <p:nvPr/>
         </p:nvSpPr>
@@ -5889,14 +6446,14 @@
       </p:sp>
       <p:pic>
         <p:nvPicPr>
-          <p:cNvPr id="16" name="Image 2" descr="preencoded.png">    </p:cNvPr>
+          <p:cNvPr id="20" name="Image 3" descr="preencoded.png">    </p:cNvPr>
           <p:cNvPicPr>
             <a:picLocks noChangeAspect="1"/>
           </p:cNvPicPr>
           <p:nvPr/>
         </p:nvPicPr>
         <p:blipFill>
-          <a:blip r:embed="rId3"/>
+          <a:blip r:embed="rId4"/>
           <a:stretch>
             <a:fillRect/>
           </a:stretch>
@@ -5913,7 +6470,7 @@
       </p:pic>
       <p:sp>
         <p:nvSpPr>
-          <p:cNvPr id="17" name="Text 9"/>
+          <p:cNvPr id="21" name="Text 12"/>
           <p:cNvSpPr txBox="1"/>
           <p:nvPr/>
         </p:nvSpPr>
@@ -8227,6 +8784,133 @@
       </p:sp>
       <p:sp>
         <p:nvSpPr>
+          <p:cNvPr id="5" name="Shape 2"/>
+          <p:cNvSpPr/>
+          <p:nvPr/>
+        </p:nvSpPr>
+        <p:spPr>
+          <a:xfrm>
+            <a:off x="8681669" y="91440"/>
+            <a:ext cx="2961386" cy="274320"/>
+          </a:xfrm>
+          <a:prstGeom prst="rect">
+            <a:avLst/>
+          </a:prstGeom>
+          <a:solidFill>
+            <a:srgbClr val="E0F2FE"/>
+          </a:solidFill>
+          <a:ln w="12700">
+            <a:solidFill>
+              <a:srgbClr val="0369A1"/>
+            </a:solidFill>
+            <a:prstDash val="solid"/>
+          </a:ln>
+        </p:spPr>
+      </p:sp>
+      <p:sp>
+        <p:nvSpPr>
+          <p:cNvPr id="6" name="Shape 3"/>
+          <p:cNvSpPr/>
+          <p:nvPr/>
+        </p:nvSpPr>
+        <p:spPr>
+          <a:xfrm>
+            <a:off x="8681669" y="91440"/>
+            <a:ext cx="73152" cy="274320"/>
+          </a:xfrm>
+          <a:prstGeom prst="rect">
+            <a:avLst/>
+          </a:prstGeom>
+          <a:solidFill>
+            <a:srgbClr val="0369A1"/>
+          </a:solidFill>
+          <a:ln w="12700">
+            <a:solidFill>
+              <a:srgbClr val="0369A1"/>
+            </a:solidFill>
+            <a:prstDash val="solid"/>
+          </a:ln>
+        </p:spPr>
+      </p:sp>
+      <p:pic>
+        <p:nvPicPr>
+          <p:cNvPr id="7" name="Image 0" descr="preencoded.png">    </p:cNvPr>
+          <p:cNvPicPr>
+            <a:picLocks noChangeAspect="1"/>
+          </p:cNvPicPr>
+          <p:nvPr/>
+        </p:nvPicPr>
+        <p:blipFill>
+          <a:blip r:embed="rId1"/>
+          <a:stretch>
+            <a:fillRect/>
+          </a:stretch>
+        </p:blipFill>
+        <p:spPr>
+          <a:xfrm>
+            <a:off x="8809685" y="128016"/>
+            <a:ext cx="201168" cy="201168"/>
+          </a:xfrm>
+          <a:prstGeom prst="rect">
+            <a:avLst/>
+          </a:prstGeom>
+        </p:spPr>
+      </p:pic>
+      <p:sp>
+        <p:nvSpPr>
+          <p:cNvPr id="8" name="Text 4"/>
+          <p:cNvSpPr txBox="1"/>
+          <p:nvPr/>
+        </p:nvSpPr>
+        <p:spPr>
+          <a:xfrm>
+            <a:off x="9065717" y="91440"/>
+            <a:ext cx="2540762" cy="274320"/>
+          </a:xfrm>
+          <a:prstGeom prst="rect">
+            <a:avLst/>
+          </a:prstGeom>
+          <a:noFill/>
+          <a:ln/>
+        </p:spPr>
+        <p:txBody>
+          <a:bodyPr wrap="square" lIns="0" tIns="0" rIns="0" bIns="0" rtlCol="0" anchor="ctr"/>
+          <a:lstStyle/>
+          <a:p>
+            <a:pPr indent="0" marL="0">
+              <a:buNone/>
+            </a:pPr>
+            <a:r>
+              <a:rPr lang="en-US" sz="1100" b="1" dirty="0">
+                <a:solidFill>
+                  <a:srgbClr val="075985"/>
+                </a:solidFill>
+                <a:latin typeface="Calibri" pitchFamily="34" charset="0"/>
+                <a:ea typeface="Calibri" pitchFamily="34" charset="-122"/>
+                <a:cs typeface="Calibri" pitchFamily="34" charset="-120"/>
+              </a:rPr>
+              <a:t>UNDERSTAND NOW</a:t>
+            </a:r>
+            <a:pPr indent="0" marL="0">
+              <a:buNone/>
+            </a:pPr>
+            <a:r>
+              <a:rPr lang="en-US" sz="1100" dirty="0">
+                <a:solidFill>
+                  <a:srgbClr val="075985"/>
+                </a:solidFill>
+                <a:latin typeface="Calibri" pitchFamily="34" charset="0"/>
+                <a:ea typeface="Calibri" pitchFamily="34" charset="-122"/>
+                <a:cs typeface="Calibri" pitchFamily="34" charset="-120"/>
+              </a:rPr>
+              <a:t> · Boolean algebra</a:t>
+            </a:r>
+            <a:endParaRPr lang="en-US" sz="1100" dirty="0"/>
+          </a:p>
+        </p:txBody>
+      </p:sp>
+      <p:sp>
+        <p:nvSpPr>
           <p:cNvPr id="25" name="Slide Number Placeholder 0"/>
           <p:cNvSpPr>
             <a:spLocks noGrp="1"/>
@@ -9631,6 +10315,133 @@
               <a:t>Careful: OR distributes over AND too. This is false for ordinary sum and product.</a:t>
             </a:r>
             <a:endParaRPr lang="en-US" sz="1500" dirty="0"/>
+          </a:p>
+        </p:txBody>
+      </p:sp>
+      <p:sp>
+        <p:nvSpPr>
+          <p:cNvPr id="5" name="Shape 2"/>
+          <p:cNvSpPr/>
+          <p:nvPr/>
+        </p:nvSpPr>
+        <p:spPr>
+          <a:xfrm>
+            <a:off x="8681669" y="91440"/>
+            <a:ext cx="2961386" cy="274320"/>
+          </a:xfrm>
+          <a:prstGeom prst="rect">
+            <a:avLst/>
+          </a:prstGeom>
+          <a:solidFill>
+            <a:srgbClr val="E0F2FE"/>
+          </a:solidFill>
+          <a:ln w="12700">
+            <a:solidFill>
+              <a:srgbClr val="0369A1"/>
+            </a:solidFill>
+            <a:prstDash val="solid"/>
+          </a:ln>
+        </p:spPr>
+      </p:sp>
+      <p:sp>
+        <p:nvSpPr>
+          <p:cNvPr id="6" name="Shape 3"/>
+          <p:cNvSpPr/>
+          <p:nvPr/>
+        </p:nvSpPr>
+        <p:spPr>
+          <a:xfrm>
+            <a:off x="8681669" y="91440"/>
+            <a:ext cx="73152" cy="274320"/>
+          </a:xfrm>
+          <a:prstGeom prst="rect">
+            <a:avLst/>
+          </a:prstGeom>
+          <a:solidFill>
+            <a:srgbClr val="0369A1"/>
+          </a:solidFill>
+          <a:ln w="12700">
+            <a:solidFill>
+              <a:srgbClr val="0369A1"/>
+            </a:solidFill>
+            <a:prstDash val="solid"/>
+          </a:ln>
+        </p:spPr>
+      </p:sp>
+      <p:pic>
+        <p:nvPicPr>
+          <p:cNvPr id="7" name="Image 0" descr="preencoded.png">    </p:cNvPr>
+          <p:cNvPicPr>
+            <a:picLocks noChangeAspect="1"/>
+          </p:cNvPicPr>
+          <p:nvPr/>
+        </p:nvPicPr>
+        <p:blipFill>
+          <a:blip r:embed="rId1"/>
+          <a:stretch>
+            <a:fillRect/>
+          </a:stretch>
+        </p:blipFill>
+        <p:spPr>
+          <a:xfrm>
+            <a:off x="8809685" y="128016"/>
+            <a:ext cx="201168" cy="201168"/>
+          </a:xfrm>
+          <a:prstGeom prst="rect">
+            <a:avLst/>
+          </a:prstGeom>
+        </p:spPr>
+      </p:pic>
+      <p:sp>
+        <p:nvSpPr>
+          <p:cNvPr id="8" name="Text 4"/>
+          <p:cNvSpPr txBox="1"/>
+          <p:nvPr/>
+        </p:nvSpPr>
+        <p:spPr>
+          <a:xfrm>
+            <a:off x="9065717" y="91440"/>
+            <a:ext cx="2540762" cy="274320"/>
+          </a:xfrm>
+          <a:prstGeom prst="rect">
+            <a:avLst/>
+          </a:prstGeom>
+          <a:noFill/>
+          <a:ln/>
+        </p:spPr>
+        <p:txBody>
+          <a:bodyPr wrap="square" lIns="0" tIns="0" rIns="0" bIns="0" rtlCol="0" anchor="ctr"/>
+          <a:lstStyle/>
+          <a:p>
+            <a:pPr indent="0" marL="0">
+              <a:buNone/>
+            </a:pPr>
+            <a:r>
+              <a:rPr lang="en-US" sz="1100" b="1" dirty="0">
+                <a:solidFill>
+                  <a:srgbClr val="075985"/>
+                </a:solidFill>
+                <a:latin typeface="Calibri" pitchFamily="34" charset="0"/>
+                <a:ea typeface="Calibri" pitchFamily="34" charset="-122"/>
+                <a:cs typeface="Calibri" pitchFamily="34" charset="-120"/>
+              </a:rPr>
+              <a:t>UNDERSTAND NOW</a:t>
+            </a:r>
+            <a:pPr indent="0" marL="0">
+              <a:buNone/>
+            </a:pPr>
+            <a:r>
+              <a:rPr lang="en-US" sz="1100" dirty="0">
+                <a:solidFill>
+                  <a:srgbClr val="075985"/>
+                </a:solidFill>
+                <a:latin typeface="Calibri" pitchFamily="34" charset="0"/>
+                <a:ea typeface="Calibri" pitchFamily="34" charset="-122"/>
+                <a:cs typeface="Calibri" pitchFamily="34" charset="-120"/>
+              </a:rPr>
+              <a:t> · Boolean algebra</a:t>
+            </a:r>
+            <a:endParaRPr lang="en-US" sz="1100" dirty="0"/>
           </a:p>
         </p:txBody>
       </p:sp>
@@ -12547,6 +13358,133 @@
       </p:sp>
       <p:sp>
         <p:nvSpPr>
+          <p:cNvPr id="15" name="Shape 12"/>
+          <p:cNvSpPr/>
+          <p:nvPr/>
+        </p:nvSpPr>
+        <p:spPr>
+          <a:xfrm>
+            <a:off x="8681669" y="91440"/>
+            <a:ext cx="2961386" cy="274320"/>
+          </a:xfrm>
+          <a:prstGeom prst="rect">
+            <a:avLst/>
+          </a:prstGeom>
+          <a:solidFill>
+            <a:srgbClr val="E0F2FE"/>
+          </a:solidFill>
+          <a:ln w="12700">
+            <a:solidFill>
+              <a:srgbClr val="0369A1"/>
+            </a:solidFill>
+            <a:prstDash val="solid"/>
+          </a:ln>
+        </p:spPr>
+      </p:sp>
+      <p:sp>
+        <p:nvSpPr>
+          <p:cNvPr id="16" name="Shape 13"/>
+          <p:cNvSpPr/>
+          <p:nvPr/>
+        </p:nvSpPr>
+        <p:spPr>
+          <a:xfrm>
+            <a:off x="8681669" y="91440"/>
+            <a:ext cx="73152" cy="274320"/>
+          </a:xfrm>
+          <a:prstGeom prst="rect">
+            <a:avLst/>
+          </a:prstGeom>
+          <a:solidFill>
+            <a:srgbClr val="0369A1"/>
+          </a:solidFill>
+          <a:ln w="12700">
+            <a:solidFill>
+              <a:srgbClr val="0369A1"/>
+            </a:solidFill>
+            <a:prstDash val="solid"/>
+          </a:ln>
+        </p:spPr>
+      </p:sp>
+      <p:pic>
+        <p:nvPicPr>
+          <p:cNvPr id="17" name="Image 0" descr="preencoded.png">    </p:cNvPr>
+          <p:cNvPicPr>
+            <a:picLocks noChangeAspect="1"/>
+          </p:cNvPicPr>
+          <p:nvPr/>
+        </p:nvPicPr>
+        <p:blipFill>
+          <a:blip r:embed="rId1"/>
+          <a:stretch>
+            <a:fillRect/>
+          </a:stretch>
+        </p:blipFill>
+        <p:spPr>
+          <a:xfrm>
+            <a:off x="8809685" y="128016"/>
+            <a:ext cx="201168" cy="201168"/>
+          </a:xfrm>
+          <a:prstGeom prst="rect">
+            <a:avLst/>
+          </a:prstGeom>
+        </p:spPr>
+      </p:pic>
+      <p:sp>
+        <p:nvSpPr>
+          <p:cNvPr id="18" name="Text 14"/>
+          <p:cNvSpPr txBox="1"/>
+          <p:nvPr/>
+        </p:nvSpPr>
+        <p:spPr>
+          <a:xfrm>
+            <a:off x="9065717" y="91440"/>
+            <a:ext cx="2540762" cy="274320"/>
+          </a:xfrm>
+          <a:prstGeom prst="rect">
+            <a:avLst/>
+          </a:prstGeom>
+          <a:noFill/>
+          <a:ln/>
+        </p:spPr>
+        <p:txBody>
+          <a:bodyPr wrap="square" lIns="0" tIns="0" rIns="0" bIns="0" rtlCol="0" anchor="ctr"/>
+          <a:lstStyle/>
+          <a:p>
+            <a:pPr indent="0" marL="0">
+              <a:buNone/>
+            </a:pPr>
+            <a:r>
+              <a:rPr lang="en-US" sz="1100" b="1" dirty="0">
+                <a:solidFill>
+                  <a:srgbClr val="075985"/>
+                </a:solidFill>
+                <a:latin typeface="Calibri" pitchFamily="34" charset="0"/>
+                <a:ea typeface="Calibri" pitchFamily="34" charset="-122"/>
+                <a:cs typeface="Calibri" pitchFamily="34" charset="-120"/>
+              </a:rPr>
+              <a:t>UNDERSTAND NOW</a:t>
+            </a:r>
+            <a:pPr indent="0" marL="0">
+              <a:buNone/>
+            </a:pPr>
+            <a:r>
+              <a:rPr lang="en-US" sz="1100" dirty="0">
+                <a:solidFill>
+                  <a:srgbClr val="075985"/>
+                </a:solidFill>
+                <a:latin typeface="Calibri" pitchFamily="34" charset="0"/>
+                <a:ea typeface="Calibri" pitchFamily="34" charset="-122"/>
+                <a:cs typeface="Calibri" pitchFamily="34" charset="-120"/>
+              </a:rPr>
+              <a:t> · Boolean algebra</a:t>
+            </a:r>
+            <a:endParaRPr lang="en-US" sz="1100" dirty="0"/>
+          </a:p>
+        </p:txBody>
+      </p:sp>
+      <p:sp>
+        <p:nvSpPr>
           <p:cNvPr id="25" name="Slide Number Placeholder 0"/>
           <p:cNvSpPr>
             <a:spLocks noGrp="1"/>
@@ -12964,6 +13902,133 @@
               <a:t>Two expressions are equivalent if they have the same truth table</a:t>
             </a:r>
             <a:endParaRPr lang="en-US" sz="2400" dirty="0"/>
+          </a:p>
+        </p:txBody>
+      </p:sp>
+      <p:sp>
+        <p:nvSpPr>
+          <p:cNvPr id="11" name="Shape 9"/>
+          <p:cNvSpPr/>
+          <p:nvPr/>
+        </p:nvSpPr>
+        <p:spPr>
+          <a:xfrm>
+            <a:off x="8681669" y="91440"/>
+            <a:ext cx="2961386" cy="274320"/>
+          </a:xfrm>
+          <a:prstGeom prst="rect">
+            <a:avLst/>
+          </a:prstGeom>
+          <a:solidFill>
+            <a:srgbClr val="E0F2FE"/>
+          </a:solidFill>
+          <a:ln w="12700">
+            <a:solidFill>
+              <a:srgbClr val="0369A1"/>
+            </a:solidFill>
+            <a:prstDash val="solid"/>
+          </a:ln>
+        </p:spPr>
+      </p:sp>
+      <p:sp>
+        <p:nvSpPr>
+          <p:cNvPr id="12" name="Shape 10"/>
+          <p:cNvSpPr/>
+          <p:nvPr/>
+        </p:nvSpPr>
+        <p:spPr>
+          <a:xfrm>
+            <a:off x="8681669" y="91440"/>
+            <a:ext cx="73152" cy="274320"/>
+          </a:xfrm>
+          <a:prstGeom prst="rect">
+            <a:avLst/>
+          </a:prstGeom>
+          <a:solidFill>
+            <a:srgbClr val="0369A1"/>
+          </a:solidFill>
+          <a:ln w="12700">
+            <a:solidFill>
+              <a:srgbClr val="0369A1"/>
+            </a:solidFill>
+            <a:prstDash val="solid"/>
+          </a:ln>
+        </p:spPr>
+      </p:sp>
+      <p:pic>
+        <p:nvPicPr>
+          <p:cNvPr id="13" name="Image 0" descr="preencoded.png">    </p:cNvPr>
+          <p:cNvPicPr>
+            <a:picLocks noChangeAspect="1"/>
+          </p:cNvPicPr>
+          <p:nvPr/>
+        </p:nvPicPr>
+        <p:blipFill>
+          <a:blip r:embed="rId1"/>
+          <a:stretch>
+            <a:fillRect/>
+          </a:stretch>
+        </p:blipFill>
+        <p:spPr>
+          <a:xfrm>
+            <a:off x="8809685" y="128016"/>
+            <a:ext cx="201168" cy="201168"/>
+          </a:xfrm>
+          <a:prstGeom prst="rect">
+            <a:avLst/>
+          </a:prstGeom>
+        </p:spPr>
+      </p:pic>
+      <p:sp>
+        <p:nvSpPr>
+          <p:cNvPr id="14" name="Text 11"/>
+          <p:cNvSpPr txBox="1"/>
+          <p:nvPr/>
+        </p:nvSpPr>
+        <p:spPr>
+          <a:xfrm>
+            <a:off x="9065717" y="91440"/>
+            <a:ext cx="2540762" cy="274320"/>
+          </a:xfrm>
+          <a:prstGeom prst="rect">
+            <a:avLst/>
+          </a:prstGeom>
+          <a:noFill/>
+          <a:ln/>
+        </p:spPr>
+        <p:txBody>
+          <a:bodyPr wrap="square" lIns="0" tIns="0" rIns="0" bIns="0" rtlCol="0" anchor="ctr"/>
+          <a:lstStyle/>
+          <a:p>
+            <a:pPr indent="0" marL="0">
+              <a:buNone/>
+            </a:pPr>
+            <a:r>
+              <a:rPr lang="en-US" sz="1100" b="1" dirty="0">
+                <a:solidFill>
+                  <a:srgbClr val="075985"/>
+                </a:solidFill>
+                <a:latin typeface="Calibri" pitchFamily="34" charset="0"/>
+                <a:ea typeface="Calibri" pitchFamily="34" charset="-122"/>
+                <a:cs typeface="Calibri" pitchFamily="34" charset="-120"/>
+              </a:rPr>
+              <a:t>UNDERSTAND NOW</a:t>
+            </a:r>
+            <a:pPr indent="0" marL="0">
+              <a:buNone/>
+            </a:pPr>
+            <a:r>
+              <a:rPr lang="en-US" sz="1100" dirty="0">
+                <a:solidFill>
+                  <a:srgbClr val="075985"/>
+                </a:solidFill>
+                <a:latin typeface="Calibri" pitchFamily="34" charset="0"/>
+                <a:ea typeface="Calibri" pitchFamily="34" charset="-122"/>
+                <a:cs typeface="Calibri" pitchFamily="34" charset="-120"/>
+              </a:rPr>
+              <a:t> · Boolean algebra</a:t>
+            </a:r>
+            <a:endParaRPr lang="en-US" sz="1100" dirty="0"/>
           </a:p>
         </p:txBody>
       </p:sp>
@@ -13837,6 +14902,133 @@
               <a:t>In the same way: x + x' . y = (x + x') . (x + y) = 1 . (x + y) = x + y</a:t>
             </a:r>
             <a:endParaRPr lang="en-US" sz="1500" dirty="0"/>
+          </a:p>
+        </p:txBody>
+      </p:sp>
+      <p:sp>
+        <p:nvSpPr>
+          <p:cNvPr id="5" name="Shape 2"/>
+          <p:cNvSpPr/>
+          <p:nvPr/>
+        </p:nvSpPr>
+        <p:spPr>
+          <a:xfrm>
+            <a:off x="8681669" y="91440"/>
+            <a:ext cx="2961386" cy="274320"/>
+          </a:xfrm>
+          <a:prstGeom prst="rect">
+            <a:avLst/>
+          </a:prstGeom>
+          <a:solidFill>
+            <a:srgbClr val="E0F2FE"/>
+          </a:solidFill>
+          <a:ln w="12700">
+            <a:solidFill>
+              <a:srgbClr val="0369A1"/>
+            </a:solidFill>
+            <a:prstDash val="solid"/>
+          </a:ln>
+        </p:spPr>
+      </p:sp>
+      <p:sp>
+        <p:nvSpPr>
+          <p:cNvPr id="6" name="Shape 3"/>
+          <p:cNvSpPr/>
+          <p:nvPr/>
+        </p:nvSpPr>
+        <p:spPr>
+          <a:xfrm>
+            <a:off x="8681669" y="91440"/>
+            <a:ext cx="73152" cy="274320"/>
+          </a:xfrm>
+          <a:prstGeom prst="rect">
+            <a:avLst/>
+          </a:prstGeom>
+          <a:solidFill>
+            <a:srgbClr val="0369A1"/>
+          </a:solidFill>
+          <a:ln w="12700">
+            <a:solidFill>
+              <a:srgbClr val="0369A1"/>
+            </a:solidFill>
+            <a:prstDash val="solid"/>
+          </a:ln>
+        </p:spPr>
+      </p:sp>
+      <p:pic>
+        <p:nvPicPr>
+          <p:cNvPr id="7" name="Image 0" descr="preencoded.png">    </p:cNvPr>
+          <p:cNvPicPr>
+            <a:picLocks noChangeAspect="1"/>
+          </p:cNvPicPr>
+          <p:nvPr/>
+        </p:nvPicPr>
+        <p:blipFill>
+          <a:blip r:embed="rId1"/>
+          <a:stretch>
+            <a:fillRect/>
+          </a:stretch>
+        </p:blipFill>
+        <p:spPr>
+          <a:xfrm>
+            <a:off x="8809685" y="128016"/>
+            <a:ext cx="201168" cy="201168"/>
+          </a:xfrm>
+          <a:prstGeom prst="rect">
+            <a:avLst/>
+          </a:prstGeom>
+        </p:spPr>
+      </p:pic>
+      <p:sp>
+        <p:nvSpPr>
+          <p:cNvPr id="8" name="Text 4"/>
+          <p:cNvSpPr txBox="1"/>
+          <p:nvPr/>
+        </p:nvSpPr>
+        <p:spPr>
+          <a:xfrm>
+            <a:off x="9065717" y="91440"/>
+            <a:ext cx="2540762" cy="274320"/>
+          </a:xfrm>
+          <a:prstGeom prst="rect">
+            <a:avLst/>
+          </a:prstGeom>
+          <a:noFill/>
+          <a:ln/>
+        </p:spPr>
+        <p:txBody>
+          <a:bodyPr wrap="square" lIns="0" tIns="0" rIns="0" bIns="0" rtlCol="0" anchor="ctr"/>
+          <a:lstStyle/>
+          <a:p>
+            <a:pPr indent="0" marL="0">
+              <a:buNone/>
+            </a:pPr>
+            <a:r>
+              <a:rPr lang="en-US" sz="1100" b="1" dirty="0">
+                <a:solidFill>
+                  <a:srgbClr val="075985"/>
+                </a:solidFill>
+                <a:latin typeface="Calibri" pitchFamily="34" charset="0"/>
+                <a:ea typeface="Calibri" pitchFamily="34" charset="-122"/>
+                <a:cs typeface="Calibri" pitchFamily="34" charset="-120"/>
+              </a:rPr>
+              <a:t>UNDERSTAND NOW</a:t>
+            </a:r>
+            <a:pPr indent="0" marL="0">
+              <a:buNone/>
+            </a:pPr>
+            <a:r>
+              <a:rPr lang="en-US" sz="1100" dirty="0">
+                <a:solidFill>
+                  <a:srgbClr val="075985"/>
+                </a:solidFill>
+                <a:latin typeface="Calibri" pitchFamily="34" charset="0"/>
+                <a:ea typeface="Calibri" pitchFamily="34" charset="-122"/>
+                <a:cs typeface="Calibri" pitchFamily="34" charset="-120"/>
+              </a:rPr>
+              <a:t> · Boolean algebra</a:t>
+            </a:r>
+            <a:endParaRPr lang="en-US" sz="1100" dirty="0"/>
           </a:p>
         </p:txBody>
       </p:sp>
@@ -20028,6 +21220,133 @@
       </p:sp>
       <p:sp>
         <p:nvSpPr>
+          <p:cNvPr id="17" name="Shape 15"/>
+          <p:cNvSpPr/>
+          <p:nvPr/>
+        </p:nvSpPr>
+        <p:spPr>
+          <a:xfrm>
+            <a:off x="7828102" y="91440"/>
+            <a:ext cx="3814953" cy="274320"/>
+          </a:xfrm>
+          <a:prstGeom prst="rect">
+            <a:avLst/>
+          </a:prstGeom>
+          <a:solidFill>
+            <a:srgbClr val="E0F2FE"/>
+          </a:solidFill>
+          <a:ln w="12700">
+            <a:solidFill>
+              <a:srgbClr val="0369A1"/>
+            </a:solidFill>
+            <a:prstDash val="solid"/>
+          </a:ln>
+        </p:spPr>
+      </p:sp>
+      <p:sp>
+        <p:nvSpPr>
+          <p:cNvPr id="18" name="Shape 16"/>
+          <p:cNvSpPr/>
+          <p:nvPr/>
+        </p:nvSpPr>
+        <p:spPr>
+          <a:xfrm>
+            <a:off x="7828102" y="91440"/>
+            <a:ext cx="73152" cy="274320"/>
+          </a:xfrm>
+          <a:prstGeom prst="rect">
+            <a:avLst/>
+          </a:prstGeom>
+          <a:solidFill>
+            <a:srgbClr val="0369A1"/>
+          </a:solidFill>
+          <a:ln w="12700">
+            <a:solidFill>
+              <a:srgbClr val="0369A1"/>
+            </a:solidFill>
+            <a:prstDash val="solid"/>
+          </a:ln>
+        </p:spPr>
+      </p:sp>
+      <p:pic>
+        <p:nvPicPr>
+          <p:cNvPr id="19" name="Image 0" descr="preencoded.png">    </p:cNvPr>
+          <p:cNvPicPr>
+            <a:picLocks noChangeAspect="1"/>
+          </p:cNvPicPr>
+          <p:nvPr/>
+        </p:nvPicPr>
+        <p:blipFill>
+          <a:blip r:embed="rId1"/>
+          <a:stretch>
+            <a:fillRect/>
+          </a:stretch>
+        </p:blipFill>
+        <p:spPr>
+          <a:xfrm>
+            <a:off x="7956118" y="128016"/>
+            <a:ext cx="201168" cy="201168"/>
+          </a:xfrm>
+          <a:prstGeom prst="rect">
+            <a:avLst/>
+          </a:prstGeom>
+        </p:spPr>
+      </p:pic>
+      <p:sp>
+        <p:nvSpPr>
+          <p:cNvPr id="20" name="Text 17"/>
+          <p:cNvSpPr txBox="1"/>
+          <p:nvPr/>
+        </p:nvSpPr>
+        <p:spPr>
+          <a:xfrm>
+            <a:off x="8212150" y="91440"/>
+            <a:ext cx="3394329" cy="274320"/>
+          </a:xfrm>
+          <a:prstGeom prst="rect">
+            <a:avLst/>
+          </a:prstGeom>
+          <a:noFill/>
+          <a:ln/>
+        </p:spPr>
+        <p:txBody>
+          <a:bodyPr wrap="square" lIns="0" tIns="0" rIns="0" bIns="0" rtlCol="0" anchor="ctr"/>
+          <a:lstStyle/>
+          <a:p>
+            <a:pPr indent="0" marL="0">
+              <a:buNone/>
+            </a:pPr>
+            <a:r>
+              <a:rPr lang="en-US" sz="1100" b="1" dirty="0">
+                <a:solidFill>
+                  <a:srgbClr val="075985"/>
+                </a:solidFill>
+                <a:latin typeface="Calibri" pitchFamily="34" charset="0"/>
+                <a:ea typeface="Calibri" pitchFamily="34" charset="-122"/>
+                <a:cs typeface="Calibri" pitchFamily="34" charset="-120"/>
+              </a:rPr>
+              <a:t>UNDERSTAND NOW</a:t>
+            </a:r>
+            <a:pPr indent="0" marL="0">
+              <a:buNone/>
+            </a:pPr>
+            <a:r>
+              <a:rPr lang="en-US" sz="1100" dirty="0">
+                <a:solidFill>
+                  <a:srgbClr val="075985"/>
+                </a:solidFill>
+                <a:latin typeface="Calibri" pitchFamily="34" charset="0"/>
+                <a:ea typeface="Calibri" pitchFamily="34" charset="-122"/>
+                <a:cs typeface="Calibri" pitchFamily="34" charset="-120"/>
+              </a:rPr>
+              <a:t> · the von Neumann architecture</a:t>
+            </a:r>
+            <a:endParaRPr lang="en-US" sz="1100" dirty="0"/>
+          </a:p>
+        </p:txBody>
+      </p:sp>
+      <p:sp>
+        <p:nvSpPr>
           <p:cNvPr id="25" name="Slide Number Placeholder 0"/>
           <p:cNvSpPr>
             <a:spLocks noGrp="1"/>
@@ -20622,6 +21941,133 @@
       </p:sp>
       <p:sp>
         <p:nvSpPr>
+          <p:cNvPr id="16" name="Shape 14"/>
+          <p:cNvSpPr/>
+          <p:nvPr/>
+        </p:nvSpPr>
+        <p:spPr>
+          <a:xfrm>
+            <a:off x="7828102" y="91440"/>
+            <a:ext cx="3814953" cy="274320"/>
+          </a:xfrm>
+          <a:prstGeom prst="rect">
+            <a:avLst/>
+          </a:prstGeom>
+          <a:solidFill>
+            <a:srgbClr val="E0F2FE"/>
+          </a:solidFill>
+          <a:ln w="12700">
+            <a:solidFill>
+              <a:srgbClr val="0369A1"/>
+            </a:solidFill>
+            <a:prstDash val="solid"/>
+          </a:ln>
+        </p:spPr>
+      </p:sp>
+      <p:sp>
+        <p:nvSpPr>
+          <p:cNvPr id="17" name="Shape 15"/>
+          <p:cNvSpPr/>
+          <p:nvPr/>
+        </p:nvSpPr>
+        <p:spPr>
+          <a:xfrm>
+            <a:off x="7828102" y="91440"/>
+            <a:ext cx="73152" cy="274320"/>
+          </a:xfrm>
+          <a:prstGeom prst="rect">
+            <a:avLst/>
+          </a:prstGeom>
+          <a:solidFill>
+            <a:srgbClr val="0369A1"/>
+          </a:solidFill>
+          <a:ln w="12700">
+            <a:solidFill>
+              <a:srgbClr val="0369A1"/>
+            </a:solidFill>
+            <a:prstDash val="solid"/>
+          </a:ln>
+        </p:spPr>
+      </p:sp>
+      <p:pic>
+        <p:nvPicPr>
+          <p:cNvPr id="18" name="Image 0" descr="preencoded.png">    </p:cNvPr>
+          <p:cNvPicPr>
+            <a:picLocks noChangeAspect="1"/>
+          </p:cNvPicPr>
+          <p:nvPr/>
+        </p:nvPicPr>
+        <p:blipFill>
+          <a:blip r:embed="rId1"/>
+          <a:stretch>
+            <a:fillRect/>
+          </a:stretch>
+        </p:blipFill>
+        <p:spPr>
+          <a:xfrm>
+            <a:off x="7956118" y="128016"/>
+            <a:ext cx="201168" cy="201168"/>
+          </a:xfrm>
+          <a:prstGeom prst="rect">
+            <a:avLst/>
+          </a:prstGeom>
+        </p:spPr>
+      </p:pic>
+      <p:sp>
+        <p:nvSpPr>
+          <p:cNvPr id="19" name="Text 16"/>
+          <p:cNvSpPr txBox="1"/>
+          <p:nvPr/>
+        </p:nvSpPr>
+        <p:spPr>
+          <a:xfrm>
+            <a:off x="8212150" y="91440"/>
+            <a:ext cx="3394329" cy="274320"/>
+          </a:xfrm>
+          <a:prstGeom prst="rect">
+            <a:avLst/>
+          </a:prstGeom>
+          <a:noFill/>
+          <a:ln/>
+        </p:spPr>
+        <p:txBody>
+          <a:bodyPr wrap="square" lIns="0" tIns="0" rIns="0" bIns="0" rtlCol="0" anchor="ctr"/>
+          <a:lstStyle/>
+          <a:p>
+            <a:pPr indent="0" marL="0">
+              <a:buNone/>
+            </a:pPr>
+            <a:r>
+              <a:rPr lang="en-US" sz="1100" b="1" dirty="0">
+                <a:solidFill>
+                  <a:srgbClr val="075985"/>
+                </a:solidFill>
+                <a:latin typeface="Calibri" pitchFamily="34" charset="0"/>
+                <a:ea typeface="Calibri" pitchFamily="34" charset="-122"/>
+                <a:cs typeface="Calibri" pitchFamily="34" charset="-120"/>
+              </a:rPr>
+              <a:t>UNDERSTAND NOW</a:t>
+            </a:r>
+            <a:pPr indent="0" marL="0">
+              <a:buNone/>
+            </a:pPr>
+            <a:r>
+              <a:rPr lang="en-US" sz="1100" dirty="0">
+                <a:solidFill>
+                  <a:srgbClr val="075985"/>
+                </a:solidFill>
+                <a:latin typeface="Calibri" pitchFamily="34" charset="0"/>
+                <a:ea typeface="Calibri" pitchFamily="34" charset="-122"/>
+                <a:cs typeface="Calibri" pitchFamily="34" charset="-120"/>
+              </a:rPr>
+              <a:t> · the von Neumann architecture</a:t>
+            </a:r>
+            <a:endParaRPr lang="en-US" sz="1100" dirty="0"/>
+          </a:p>
+        </p:txBody>
+      </p:sp>
+      <p:sp>
+        <p:nvSpPr>
           <p:cNvPr id="25" name="Slide Number Placeholder 0"/>
           <p:cNvSpPr>
             <a:spLocks noGrp="1"/>
@@ -21344,6 +22790,133 @@
       </p:sp>
       <p:sp>
         <p:nvSpPr>
+          <p:cNvPr id="19" name="Shape 17"/>
+          <p:cNvSpPr/>
+          <p:nvPr/>
+        </p:nvSpPr>
+        <p:spPr>
+          <a:xfrm>
+            <a:off x="7828102" y="91440"/>
+            <a:ext cx="3814953" cy="274320"/>
+          </a:xfrm>
+          <a:prstGeom prst="rect">
+            <a:avLst/>
+          </a:prstGeom>
+          <a:solidFill>
+            <a:srgbClr val="E0F2FE"/>
+          </a:solidFill>
+          <a:ln w="12700">
+            <a:solidFill>
+              <a:srgbClr val="0369A1"/>
+            </a:solidFill>
+            <a:prstDash val="solid"/>
+          </a:ln>
+        </p:spPr>
+      </p:sp>
+      <p:sp>
+        <p:nvSpPr>
+          <p:cNvPr id="20" name="Shape 18"/>
+          <p:cNvSpPr/>
+          <p:nvPr/>
+        </p:nvSpPr>
+        <p:spPr>
+          <a:xfrm>
+            <a:off x="7828102" y="91440"/>
+            <a:ext cx="73152" cy="274320"/>
+          </a:xfrm>
+          <a:prstGeom prst="rect">
+            <a:avLst/>
+          </a:prstGeom>
+          <a:solidFill>
+            <a:srgbClr val="0369A1"/>
+          </a:solidFill>
+          <a:ln w="12700">
+            <a:solidFill>
+              <a:srgbClr val="0369A1"/>
+            </a:solidFill>
+            <a:prstDash val="solid"/>
+          </a:ln>
+        </p:spPr>
+      </p:sp>
+      <p:pic>
+        <p:nvPicPr>
+          <p:cNvPr id="21" name="Image 0" descr="preencoded.png">    </p:cNvPr>
+          <p:cNvPicPr>
+            <a:picLocks noChangeAspect="1"/>
+          </p:cNvPicPr>
+          <p:nvPr/>
+        </p:nvPicPr>
+        <p:blipFill>
+          <a:blip r:embed="rId1"/>
+          <a:stretch>
+            <a:fillRect/>
+          </a:stretch>
+        </p:blipFill>
+        <p:spPr>
+          <a:xfrm>
+            <a:off x="7956118" y="128016"/>
+            <a:ext cx="201168" cy="201168"/>
+          </a:xfrm>
+          <a:prstGeom prst="rect">
+            <a:avLst/>
+          </a:prstGeom>
+        </p:spPr>
+      </p:pic>
+      <p:sp>
+        <p:nvSpPr>
+          <p:cNvPr id="22" name="Text 19"/>
+          <p:cNvSpPr txBox="1"/>
+          <p:nvPr/>
+        </p:nvSpPr>
+        <p:spPr>
+          <a:xfrm>
+            <a:off x="8212150" y="91440"/>
+            <a:ext cx="3394329" cy="274320"/>
+          </a:xfrm>
+          <a:prstGeom prst="rect">
+            <a:avLst/>
+          </a:prstGeom>
+          <a:noFill/>
+          <a:ln/>
+        </p:spPr>
+        <p:txBody>
+          <a:bodyPr wrap="square" lIns="0" tIns="0" rIns="0" bIns="0" rtlCol="0" anchor="ctr"/>
+          <a:lstStyle/>
+          <a:p>
+            <a:pPr indent="0" marL="0">
+              <a:buNone/>
+            </a:pPr>
+            <a:r>
+              <a:rPr lang="en-US" sz="1100" b="1" dirty="0">
+                <a:solidFill>
+                  <a:srgbClr val="075985"/>
+                </a:solidFill>
+                <a:latin typeface="Calibri" pitchFamily="34" charset="0"/>
+                <a:ea typeface="Calibri" pitchFamily="34" charset="-122"/>
+                <a:cs typeface="Calibri" pitchFamily="34" charset="-120"/>
+              </a:rPr>
+              <a:t>UNDERSTAND NOW</a:t>
+            </a:r>
+            <a:pPr indent="0" marL="0">
+              <a:buNone/>
+            </a:pPr>
+            <a:r>
+              <a:rPr lang="en-US" sz="1100" dirty="0">
+                <a:solidFill>
+                  <a:srgbClr val="075985"/>
+                </a:solidFill>
+                <a:latin typeface="Calibri" pitchFamily="34" charset="0"/>
+                <a:ea typeface="Calibri" pitchFamily="34" charset="-122"/>
+                <a:cs typeface="Calibri" pitchFamily="34" charset="-120"/>
+              </a:rPr>
+              <a:t> · the von Neumann architecture</a:t>
+            </a:r>
+            <a:endParaRPr lang="en-US" sz="1100" dirty="0"/>
+          </a:p>
+        </p:txBody>
+      </p:sp>
+      <p:sp>
+        <p:nvSpPr>
           <p:cNvPr id="25" name="Slide Number Placeholder 0"/>
           <p:cNvSpPr>
             <a:spLocks noGrp="1"/>
@@ -21826,6 +23399,133 @@
               <a:t>two voltage levels on a wire, two states of a switch, two values of a Boolean variable</a:t>
             </a:r>
             <a:endParaRPr lang="en-US" sz="1900" dirty="0"/>
+          </a:p>
+        </p:txBody>
+      </p:sp>
+      <p:sp>
+        <p:nvSpPr>
+          <p:cNvPr id="14" name="Shape 12"/>
+          <p:cNvSpPr/>
+          <p:nvPr/>
+        </p:nvSpPr>
+        <p:spPr>
+          <a:xfrm>
+            <a:off x="8222056" y="91440"/>
+            <a:ext cx="3420999" cy="274320"/>
+          </a:xfrm>
+          <a:prstGeom prst="rect">
+            <a:avLst/>
+          </a:prstGeom>
+          <a:solidFill>
+            <a:srgbClr val="E0F2FE"/>
+          </a:solidFill>
+          <a:ln w="12700">
+            <a:solidFill>
+              <a:srgbClr val="0369A1"/>
+            </a:solidFill>
+            <a:prstDash val="solid"/>
+          </a:ln>
+        </p:spPr>
+      </p:sp>
+      <p:sp>
+        <p:nvSpPr>
+          <p:cNvPr id="15" name="Shape 13"/>
+          <p:cNvSpPr/>
+          <p:nvPr/>
+        </p:nvSpPr>
+        <p:spPr>
+          <a:xfrm>
+            <a:off x="8222056" y="91440"/>
+            <a:ext cx="73152" cy="274320"/>
+          </a:xfrm>
+          <a:prstGeom prst="rect">
+            <a:avLst/>
+          </a:prstGeom>
+          <a:solidFill>
+            <a:srgbClr val="0369A1"/>
+          </a:solidFill>
+          <a:ln w="12700">
+            <a:solidFill>
+              <a:srgbClr val="0369A1"/>
+            </a:solidFill>
+            <a:prstDash val="solid"/>
+          </a:ln>
+        </p:spPr>
+      </p:sp>
+      <p:pic>
+        <p:nvPicPr>
+          <p:cNvPr id="16" name="Image 0" descr="preencoded.png">    </p:cNvPr>
+          <p:cNvPicPr>
+            <a:picLocks noChangeAspect="1"/>
+          </p:cNvPicPr>
+          <p:nvPr/>
+        </p:nvPicPr>
+        <p:blipFill>
+          <a:blip r:embed="rId1"/>
+          <a:stretch>
+            <a:fillRect/>
+          </a:stretch>
+        </p:blipFill>
+        <p:spPr>
+          <a:xfrm>
+            <a:off x="8350072" y="128016"/>
+            <a:ext cx="201168" cy="201168"/>
+          </a:xfrm>
+          <a:prstGeom prst="rect">
+            <a:avLst/>
+          </a:prstGeom>
+        </p:spPr>
+      </p:pic>
+      <p:sp>
+        <p:nvSpPr>
+          <p:cNvPr id="17" name="Text 14"/>
+          <p:cNvSpPr txBox="1"/>
+          <p:nvPr/>
+        </p:nvSpPr>
+        <p:spPr>
+          <a:xfrm>
+            <a:off x="8606104" y="91440"/>
+            <a:ext cx="3000375" cy="274320"/>
+          </a:xfrm>
+          <a:prstGeom prst="rect">
+            <a:avLst/>
+          </a:prstGeom>
+          <a:noFill/>
+          <a:ln/>
+        </p:spPr>
+        <p:txBody>
+          <a:bodyPr wrap="square" lIns="0" tIns="0" rIns="0" bIns="0" rtlCol="0" anchor="ctr"/>
+          <a:lstStyle/>
+          <a:p>
+            <a:pPr indent="0" marL="0">
+              <a:buNone/>
+            </a:pPr>
+            <a:r>
+              <a:rPr lang="en-US" sz="1100" b="1" dirty="0">
+                <a:solidFill>
+                  <a:srgbClr val="075985"/>
+                </a:solidFill>
+                <a:latin typeface="Calibri" pitchFamily="34" charset="0"/>
+                <a:ea typeface="Calibri" pitchFamily="34" charset="-122"/>
+                <a:cs typeface="Calibri" pitchFamily="34" charset="-120"/>
+              </a:rPr>
+              <a:t>UNDERSTAND NOW</a:t>
+            </a:r>
+            <a:pPr indent="0" marL="0">
+              <a:buNone/>
+            </a:pPr>
+            <a:r>
+              <a:rPr lang="en-US" sz="1100" dirty="0">
+                <a:solidFill>
+                  <a:srgbClr val="075985"/>
+                </a:solidFill>
+                <a:latin typeface="Calibri" pitchFamily="34" charset="0"/>
+                <a:ea typeface="Calibri" pitchFamily="34" charset="-122"/>
+                <a:cs typeface="Calibri" pitchFamily="34" charset="-120"/>
+              </a:rPr>
+              <a:t> · analysis and synthesis</a:t>
+            </a:r>
+            <a:endParaRPr lang="en-US" sz="1100" dirty="0"/>
           </a:p>
         </p:txBody>
       </p:sp>
@@ -22305,6 +24005,324 @@
       </p:sp>
       <p:sp>
         <p:nvSpPr>
+          <p:cNvPr id="9" name="Shape 7"/>
+          <p:cNvSpPr/>
+          <p:nvPr/>
+        </p:nvSpPr>
+        <p:spPr>
+          <a:xfrm>
+            <a:off x="6758000" y="91440"/>
+            <a:ext cx="4885055" cy="274320"/>
+          </a:xfrm>
+          <a:prstGeom prst="rect">
+            <a:avLst/>
+          </a:prstGeom>
+          <a:solidFill>
+            <a:srgbClr val="F3E8FF"/>
+          </a:solidFill>
+          <a:ln w="12700">
+            <a:solidFill>
+              <a:srgbClr val="7E22CE"/>
+            </a:solidFill>
+            <a:prstDash val="dash"/>
+          </a:ln>
+        </p:spPr>
+      </p:sp>
+      <p:sp>
+        <p:nvSpPr>
+          <p:cNvPr id="10" name="Shape 8"/>
+          <p:cNvSpPr/>
+          <p:nvPr/>
+        </p:nvSpPr>
+        <p:spPr>
+          <a:xfrm>
+            <a:off x="6785432" y="128016"/>
+            <a:ext cx="45720" cy="45720"/>
+          </a:xfrm>
+          <a:prstGeom prst="rect">
+            <a:avLst/>
+          </a:prstGeom>
+          <a:solidFill>
+            <a:srgbClr val="7E22CE"/>
+          </a:solidFill>
+          <a:ln w="12700">
+            <a:solidFill>
+              <a:srgbClr val="7E22CE"/>
+            </a:solidFill>
+            <a:prstDash val="solid"/>
+          </a:ln>
+        </p:spPr>
+      </p:sp>
+      <p:sp>
+        <p:nvSpPr>
+          <p:cNvPr id="11" name="Shape 9"/>
+          <p:cNvSpPr/>
+          <p:nvPr/>
+        </p:nvSpPr>
+        <p:spPr>
+          <a:xfrm>
+            <a:off x="6785432" y="205740"/>
+            <a:ext cx="45720" cy="45720"/>
+          </a:xfrm>
+          <a:prstGeom prst="rect">
+            <a:avLst/>
+          </a:prstGeom>
+          <a:solidFill>
+            <a:srgbClr val="7E22CE"/>
+          </a:solidFill>
+          <a:ln w="12700">
+            <a:solidFill>
+              <a:srgbClr val="7E22CE"/>
+            </a:solidFill>
+            <a:prstDash val="solid"/>
+          </a:ln>
+        </p:spPr>
+      </p:sp>
+      <p:sp>
+        <p:nvSpPr>
+          <p:cNvPr id="12" name="Shape 10"/>
+          <p:cNvSpPr/>
+          <p:nvPr/>
+        </p:nvSpPr>
+        <p:spPr>
+          <a:xfrm>
+            <a:off x="6785432" y="283464"/>
+            <a:ext cx="45720" cy="45720"/>
+          </a:xfrm>
+          <a:prstGeom prst="rect">
+            <a:avLst/>
+          </a:prstGeom>
+          <a:solidFill>
+            <a:srgbClr val="7E22CE"/>
+          </a:solidFill>
+          <a:ln w="12700">
+            <a:solidFill>
+              <a:srgbClr val="7E22CE"/>
+            </a:solidFill>
+            <a:prstDash val="solid"/>
+          </a:ln>
+        </p:spPr>
+      </p:sp>
+      <p:pic>
+        <p:nvPicPr>
+          <p:cNvPr id="13" name="Image 0" descr="preencoded.png">    </p:cNvPr>
+          <p:cNvPicPr>
+            <a:picLocks noChangeAspect="1"/>
+          </p:cNvPicPr>
+          <p:nvPr/>
+        </p:nvPicPr>
+        <p:blipFill>
+          <a:blip r:embed="rId1"/>
+          <a:stretch>
+            <a:fillRect/>
+          </a:stretch>
+        </p:blipFill>
+        <p:spPr>
+          <a:xfrm>
+            <a:off x="6886016" y="128016"/>
+            <a:ext cx="201168" cy="201168"/>
+          </a:xfrm>
+          <a:prstGeom prst="rect">
+            <a:avLst/>
+          </a:prstGeom>
+        </p:spPr>
+      </p:pic>
+      <p:sp>
+        <p:nvSpPr>
+          <p:cNvPr id="14" name="Text 11"/>
+          <p:cNvSpPr txBox="1"/>
+          <p:nvPr/>
+        </p:nvSpPr>
+        <p:spPr>
+          <a:xfrm>
+            <a:off x="7142048" y="91440"/>
+            <a:ext cx="4464431" cy="274320"/>
+          </a:xfrm>
+          <a:prstGeom prst="rect">
+            <a:avLst/>
+          </a:prstGeom>
+          <a:noFill/>
+          <a:ln/>
+        </p:spPr>
+        <p:txBody>
+          <a:bodyPr wrap="square" lIns="0" tIns="0" rIns="0" bIns="0" rtlCol="0" anchor="ctr"/>
+          <a:lstStyle/>
+          <a:p>
+            <a:pPr indent="0" marL="0">
+              <a:buNone/>
+            </a:pPr>
+            <a:r>
+              <a:rPr lang="en-US" sz="1100" b="1" dirty="0">
+                <a:solidFill>
+                  <a:srgbClr val="6B21A8"/>
+                </a:solidFill>
+                <a:latin typeface="Calibri" pitchFamily="34" charset="0"/>
+                <a:ea typeface="Calibri" pitchFamily="34" charset="-122"/>
+                <a:cs typeface="Calibri" pitchFamily="34" charset="-120"/>
+              </a:rPr>
+              <a:t>UNDERSTAND LATER</a:t>
+            </a:r>
+            <a:pPr indent="0" marL="0">
+              <a:buNone/>
+            </a:pPr>
+            <a:r>
+              <a:rPr lang="en-US" sz="1100" dirty="0">
+                <a:solidFill>
+                  <a:srgbClr val="6B21A8"/>
+                </a:solidFill>
+                <a:latin typeface="Calibri" pitchFamily="34" charset="0"/>
+                <a:ea typeface="Calibri" pitchFamily="34" charset="-122"/>
+                <a:cs typeface="Calibri" pitchFamily="34" charset="-120"/>
+              </a:rPr>
+              <a:t> · minimisation, Karnaugh maps</a:t>
+            </a:r>
+            <a:pPr indent="0" marL="0">
+              <a:buNone/>
+            </a:pPr>
+            <a:r>
+              <a:rPr lang="en-US" sz="1100" b="1" dirty="0">
+                <a:solidFill>
+                  <a:srgbClr val="6B21A8"/>
+                </a:solidFill>
+                <a:latin typeface="Calibri" pitchFamily="34" charset="0"/>
+                <a:ea typeface="Calibri" pitchFamily="34" charset="-122"/>
+                <a:cs typeface="Calibri" pitchFamily="34" charset="-120"/>
+              </a:rPr>
+              <a:t> → Lecture 09</a:t>
+            </a:r>
+            <a:endParaRPr lang="en-US" sz="1100" dirty="0"/>
+          </a:p>
+        </p:txBody>
+      </p:sp>
+      <p:sp>
+        <p:nvSpPr>
+          <p:cNvPr id="15" name="Shape 12"/>
+          <p:cNvSpPr/>
+          <p:nvPr/>
+        </p:nvSpPr>
+        <p:spPr>
+          <a:xfrm>
+            <a:off x="3227273" y="91440"/>
+            <a:ext cx="3420999" cy="274320"/>
+          </a:xfrm>
+          <a:prstGeom prst="rect">
+            <a:avLst/>
+          </a:prstGeom>
+          <a:solidFill>
+            <a:srgbClr val="E0F2FE"/>
+          </a:solidFill>
+          <a:ln w="12700">
+            <a:solidFill>
+              <a:srgbClr val="0369A1"/>
+            </a:solidFill>
+            <a:prstDash val="solid"/>
+          </a:ln>
+        </p:spPr>
+      </p:sp>
+      <p:sp>
+        <p:nvSpPr>
+          <p:cNvPr id="16" name="Shape 13"/>
+          <p:cNvSpPr/>
+          <p:nvPr/>
+        </p:nvSpPr>
+        <p:spPr>
+          <a:xfrm>
+            <a:off x="3227273" y="91440"/>
+            <a:ext cx="73152" cy="274320"/>
+          </a:xfrm>
+          <a:prstGeom prst="rect">
+            <a:avLst/>
+          </a:prstGeom>
+          <a:solidFill>
+            <a:srgbClr val="0369A1"/>
+          </a:solidFill>
+          <a:ln w="12700">
+            <a:solidFill>
+              <a:srgbClr val="0369A1"/>
+            </a:solidFill>
+            <a:prstDash val="solid"/>
+          </a:ln>
+        </p:spPr>
+      </p:sp>
+      <p:pic>
+        <p:nvPicPr>
+          <p:cNvPr id="17" name="Image 1" descr="preencoded.png">    </p:cNvPr>
+          <p:cNvPicPr>
+            <a:picLocks noChangeAspect="1"/>
+          </p:cNvPicPr>
+          <p:nvPr/>
+        </p:nvPicPr>
+        <p:blipFill>
+          <a:blip r:embed="rId2"/>
+          <a:stretch>
+            <a:fillRect/>
+          </a:stretch>
+        </p:blipFill>
+        <p:spPr>
+          <a:xfrm>
+            <a:off x="3355289" y="128016"/>
+            <a:ext cx="201168" cy="201168"/>
+          </a:xfrm>
+          <a:prstGeom prst="rect">
+            <a:avLst/>
+          </a:prstGeom>
+        </p:spPr>
+      </p:pic>
+      <p:sp>
+        <p:nvSpPr>
+          <p:cNvPr id="18" name="Text 14"/>
+          <p:cNvSpPr txBox="1"/>
+          <p:nvPr/>
+        </p:nvSpPr>
+        <p:spPr>
+          <a:xfrm>
+            <a:off x="3611321" y="91440"/>
+            <a:ext cx="3000375" cy="274320"/>
+          </a:xfrm>
+          <a:prstGeom prst="rect">
+            <a:avLst/>
+          </a:prstGeom>
+          <a:noFill/>
+          <a:ln/>
+        </p:spPr>
+        <p:txBody>
+          <a:bodyPr wrap="square" lIns="0" tIns="0" rIns="0" bIns="0" rtlCol="0" anchor="ctr"/>
+          <a:lstStyle/>
+          <a:p>
+            <a:pPr indent="0" marL="0">
+              <a:buNone/>
+            </a:pPr>
+            <a:r>
+              <a:rPr lang="en-US" sz="1100" b="1" dirty="0">
+                <a:solidFill>
+                  <a:srgbClr val="075985"/>
+                </a:solidFill>
+                <a:latin typeface="Calibri" pitchFamily="34" charset="0"/>
+                <a:ea typeface="Calibri" pitchFamily="34" charset="-122"/>
+                <a:cs typeface="Calibri" pitchFamily="34" charset="-120"/>
+              </a:rPr>
+              <a:t>UNDERSTAND NOW</a:t>
+            </a:r>
+            <a:pPr indent="0" marL="0">
+              <a:buNone/>
+            </a:pPr>
+            <a:r>
+              <a:rPr lang="en-US" sz="1100" dirty="0">
+                <a:solidFill>
+                  <a:srgbClr val="075985"/>
+                </a:solidFill>
+                <a:latin typeface="Calibri" pitchFamily="34" charset="0"/>
+                <a:ea typeface="Calibri" pitchFamily="34" charset="-122"/>
+                <a:cs typeface="Calibri" pitchFamily="34" charset="-120"/>
+              </a:rPr>
+              <a:t> · analysis and synthesis</a:t>
+            </a:r>
+            <a:endParaRPr lang="en-US" sz="1100" dirty="0"/>
+          </a:p>
+        </p:txBody>
+      </p:sp>
+      <p:sp>
+        <p:nvSpPr>
           <p:cNvPr id="25" name="Slide Number Placeholder 0"/>
           <p:cNvSpPr>
             <a:spLocks noGrp="1"/>
@@ -22792,6 +24810,133 @@
       </p:sp>
       <p:sp>
         <p:nvSpPr>
+          <p:cNvPr id="14" name="Shape 12"/>
+          <p:cNvSpPr/>
+          <p:nvPr/>
+        </p:nvSpPr>
+        <p:spPr>
+          <a:xfrm>
+            <a:off x="8681669" y="91440"/>
+            <a:ext cx="2961386" cy="274320"/>
+          </a:xfrm>
+          <a:prstGeom prst="rect">
+            <a:avLst/>
+          </a:prstGeom>
+          <a:solidFill>
+            <a:srgbClr val="E0F2FE"/>
+          </a:solidFill>
+          <a:ln w="12700">
+            <a:solidFill>
+              <a:srgbClr val="0369A1"/>
+            </a:solidFill>
+            <a:prstDash val="solid"/>
+          </a:ln>
+        </p:spPr>
+      </p:sp>
+      <p:sp>
+        <p:nvSpPr>
+          <p:cNvPr id="15" name="Shape 13"/>
+          <p:cNvSpPr/>
+          <p:nvPr/>
+        </p:nvSpPr>
+        <p:spPr>
+          <a:xfrm>
+            <a:off x="8681669" y="91440"/>
+            <a:ext cx="73152" cy="274320"/>
+          </a:xfrm>
+          <a:prstGeom prst="rect">
+            <a:avLst/>
+          </a:prstGeom>
+          <a:solidFill>
+            <a:srgbClr val="0369A1"/>
+          </a:solidFill>
+          <a:ln w="12700">
+            <a:solidFill>
+              <a:srgbClr val="0369A1"/>
+            </a:solidFill>
+            <a:prstDash val="solid"/>
+          </a:ln>
+        </p:spPr>
+      </p:sp>
+      <p:pic>
+        <p:nvPicPr>
+          <p:cNvPr id="16" name="Image 0" descr="preencoded.png">    </p:cNvPr>
+          <p:cNvPicPr>
+            <a:picLocks noChangeAspect="1"/>
+          </p:cNvPicPr>
+          <p:nvPr/>
+        </p:nvPicPr>
+        <p:blipFill>
+          <a:blip r:embed="rId1"/>
+          <a:stretch>
+            <a:fillRect/>
+          </a:stretch>
+        </p:blipFill>
+        <p:spPr>
+          <a:xfrm>
+            <a:off x="8809685" y="128016"/>
+            <a:ext cx="201168" cy="201168"/>
+          </a:xfrm>
+          <a:prstGeom prst="rect">
+            <a:avLst/>
+          </a:prstGeom>
+        </p:spPr>
+      </p:pic>
+      <p:sp>
+        <p:nvSpPr>
+          <p:cNvPr id="17" name="Text 14"/>
+          <p:cNvSpPr txBox="1"/>
+          <p:nvPr/>
+        </p:nvSpPr>
+        <p:spPr>
+          <a:xfrm>
+            <a:off x="9065717" y="91440"/>
+            <a:ext cx="2540762" cy="274320"/>
+          </a:xfrm>
+          <a:prstGeom prst="rect">
+            <a:avLst/>
+          </a:prstGeom>
+          <a:noFill/>
+          <a:ln/>
+        </p:spPr>
+        <p:txBody>
+          <a:bodyPr wrap="square" lIns="0" tIns="0" rIns="0" bIns="0" rtlCol="0" anchor="ctr"/>
+          <a:lstStyle/>
+          <a:p>
+            <a:pPr indent="0" marL="0">
+              <a:buNone/>
+            </a:pPr>
+            <a:r>
+              <a:rPr lang="en-US" sz="1100" b="1" dirty="0">
+                <a:solidFill>
+                  <a:srgbClr val="075985"/>
+                </a:solidFill>
+                <a:latin typeface="Calibri" pitchFamily="34" charset="0"/>
+                <a:ea typeface="Calibri" pitchFamily="34" charset="-122"/>
+                <a:cs typeface="Calibri" pitchFamily="34" charset="-120"/>
+              </a:rPr>
+              <a:t>UNDERSTAND NOW</a:t>
+            </a:r>
+            <a:pPr indent="0" marL="0">
+              <a:buNone/>
+            </a:pPr>
+            <a:r>
+              <a:rPr lang="en-US" sz="1100" dirty="0">
+                <a:solidFill>
+                  <a:srgbClr val="075985"/>
+                </a:solidFill>
+                <a:latin typeface="Calibri" pitchFamily="34" charset="0"/>
+                <a:ea typeface="Calibri" pitchFamily="34" charset="-122"/>
+                <a:cs typeface="Calibri" pitchFamily="34" charset="-120"/>
+              </a:rPr>
+              <a:t> · Boolean algebra</a:t>
+            </a:r>
+            <a:endParaRPr lang="en-US" sz="1100" dirty="0"/>
+          </a:p>
+        </p:txBody>
+      </p:sp>
+      <p:sp>
+        <p:nvSpPr>
           <p:cNvPr id="25" name="Slide Number Placeholder 0"/>
           <p:cNvSpPr>
             <a:spLocks noGrp="1"/>
@@ -22978,9 +25123,59 @@
           </a:p>
         </p:txBody>
       </p:sp>
+      <p:sp>
+        <p:nvSpPr>
+          <p:cNvPr id="5" name="Shape 3"/>
+          <p:cNvSpPr/>
+          <p:nvPr/>
+        </p:nvSpPr>
+        <p:spPr>
+          <a:xfrm>
+            <a:off x="8944305" y="91440"/>
+            <a:ext cx="2698750" cy="274320"/>
+          </a:xfrm>
+          <a:prstGeom prst="rect">
+            <a:avLst/>
+          </a:prstGeom>
+          <a:solidFill>
+            <a:srgbClr val="E0F2FE"/>
+          </a:solidFill>
+          <a:ln w="12700">
+            <a:solidFill>
+              <a:srgbClr val="0369A1"/>
+            </a:solidFill>
+            <a:prstDash val="solid"/>
+          </a:ln>
+        </p:spPr>
+      </p:sp>
+      <p:sp>
+        <p:nvSpPr>
+          <p:cNvPr id="6" name="Shape 4"/>
+          <p:cNvSpPr/>
+          <p:nvPr/>
+        </p:nvSpPr>
+        <p:spPr>
+          <a:xfrm>
+            <a:off x="8944305" y="91440"/>
+            <a:ext cx="73152" cy="274320"/>
+          </a:xfrm>
+          <a:prstGeom prst="rect">
+            <a:avLst/>
+          </a:prstGeom>
+          <a:solidFill>
+            <a:srgbClr val="0369A1"/>
+          </a:solidFill>
+          <a:ln w="12700">
+            <a:solidFill>
+              <a:srgbClr val="0369A1"/>
+            </a:solidFill>
+            <a:prstDash val="solid"/>
+          </a:ln>
+        </p:spPr>
+      </p:sp>
       <p:pic>
         <p:nvPicPr>
-          <p:cNvPr id="6" name="Image 0" descr="preencoded.png">    </p:cNvPr>
+          <p:cNvPr id="7" name="Image 0" descr="preencoded.png">    </p:cNvPr>
           <p:cNvPicPr>
             <a:picLocks noChangeAspect="1"/>
           </p:cNvPicPr>
@@ -22994,6 +25189,83 @@
         </p:blipFill>
         <p:spPr>
           <a:xfrm>
+            <a:off x="9072321" y="128016"/>
+            <a:ext cx="201168" cy="201168"/>
+          </a:xfrm>
+          <a:prstGeom prst="rect">
+            <a:avLst/>
+          </a:prstGeom>
+        </p:spPr>
+      </p:pic>
+      <p:sp>
+        <p:nvSpPr>
+          <p:cNvPr id="8" name="Text 5"/>
+          <p:cNvSpPr txBox="1"/>
+          <p:nvPr/>
+        </p:nvSpPr>
+        <p:spPr>
+          <a:xfrm>
+            <a:off x="9328353" y="91440"/>
+            <a:ext cx="2278126" cy="274320"/>
+          </a:xfrm>
+          <a:prstGeom prst="rect">
+            <a:avLst/>
+          </a:prstGeom>
+          <a:noFill/>
+          <a:ln/>
+        </p:spPr>
+        <p:txBody>
+          <a:bodyPr wrap="square" lIns="0" tIns="0" rIns="0" bIns="0" rtlCol="0" anchor="ctr"/>
+          <a:lstStyle/>
+          <a:p>
+            <a:pPr indent="0" marL="0">
+              <a:buNone/>
+            </a:pPr>
+            <a:r>
+              <a:rPr lang="en-US" sz="1100" b="1" dirty="0">
+                <a:solidFill>
+                  <a:srgbClr val="075985"/>
+                </a:solidFill>
+                <a:latin typeface="Calibri" pitchFamily="34" charset="0"/>
+                <a:ea typeface="Calibri" pitchFamily="34" charset="-122"/>
+                <a:cs typeface="Calibri" pitchFamily="34" charset="-120"/>
+              </a:rPr>
+              <a:t>UNDERSTAND NOW</a:t>
+            </a:r>
+            <a:pPr indent="0" marL="0">
+              <a:buNone/>
+            </a:pPr>
+            <a:r>
+              <a:rPr lang="en-US" sz="1100" dirty="0">
+                <a:solidFill>
+                  <a:srgbClr val="075985"/>
+                </a:solidFill>
+                <a:latin typeface="Calibri" pitchFamily="34" charset="0"/>
+                <a:ea typeface="Calibri" pitchFamily="34" charset="-122"/>
+                <a:cs typeface="Calibri" pitchFamily="34" charset="-120"/>
+              </a:rPr>
+              <a:t> · logic gates</a:t>
+            </a:r>
+            <a:endParaRPr lang="en-US" sz="1100" dirty="0"/>
+          </a:p>
+        </p:txBody>
+      </p:sp>
+      <p:pic>
+        <p:nvPicPr>
+          <p:cNvPr id="10" name="Image 1" descr="preencoded.png">    </p:cNvPr>
+          <p:cNvPicPr>
+            <a:picLocks noChangeAspect="1"/>
+          </p:cNvPicPr>
+          <p:nvPr/>
+        </p:nvPicPr>
+        <p:blipFill>
+          <a:blip r:embed="rId2"/>
+          <a:stretch>
+            <a:fillRect/>
+          </a:stretch>
+        </p:blipFill>
+        <p:spPr>
+          <a:xfrm>
             <a:off x="822960" y="2236278"/>
             <a:ext cx="2966618" cy="830964"/>
           </a:xfrm>
@@ -23004,7 +25276,7 @@
       </p:pic>
       <p:sp>
         <p:nvSpPr>
-          <p:cNvPr id="7" name="Text 3"/>
+          <p:cNvPr id="11" name="Text 6"/>
           <p:cNvSpPr txBox="1"/>
           <p:nvPr/>
         </p:nvSpPr>
@@ -24104,7 +26376,7 @@
       </p:graphicFrame>
       <p:sp>
         <p:nvSpPr>
-          <p:cNvPr id="9" name="Shape 4"/>
+          <p:cNvPr id="13" name="Shape 7"/>
           <p:cNvSpPr/>
           <p:nvPr/>
         </p:nvSpPr>
@@ -24131,7 +26403,7 @@
       </p:sp>
       <p:sp>
         <p:nvSpPr>
-          <p:cNvPr id="10" name="Text 5"/>
+          <p:cNvPr id="14" name="Text 8"/>
           <p:cNvSpPr txBox="1"/>
           <p:nvPr/>
         </p:nvSpPr>
@@ -24178,14 +26450,14 @@
       </p:sp>
       <p:pic>
         <p:nvPicPr>
-          <p:cNvPr id="11" name="Image 1" descr="preencoded.png">    </p:cNvPr>
+          <p:cNvPr id="15" name="Image 2" descr="preencoded.png">    </p:cNvPr>
           <p:cNvPicPr>
             <a:picLocks noChangeAspect="1"/>
           </p:cNvPicPr>
           <p:nvPr/>
         </p:nvPicPr>
         <p:blipFill>
-          <a:blip r:embed="rId2"/>
+          <a:blip r:embed="rId3"/>
           <a:stretch>
             <a:fillRect/>
           </a:stretch>
@@ -24202,7 +26474,7 @@
       </p:pic>
       <p:sp>
         <p:nvSpPr>
-          <p:cNvPr id="12" name="Text 6"/>
+          <p:cNvPr id="16" name="Text 9"/>
           <p:cNvSpPr txBox="1"/>
           <p:nvPr/>
         </p:nvSpPr>
@@ -25302,7 +27574,7 @@
       </p:graphicFrame>
       <p:sp>
         <p:nvSpPr>
-          <p:cNvPr id="14" name="Shape 7"/>
+          <p:cNvPr id="18" name="Shape 10"/>
           <p:cNvSpPr/>
           <p:nvPr/>
         </p:nvSpPr>
@@ -25329,7 +27601,7 @@
       </p:sp>
       <p:sp>
         <p:nvSpPr>
-          <p:cNvPr id="15" name="Text 8"/>
+          <p:cNvPr id="19" name="Text 11"/>
           <p:cNvSpPr txBox="1"/>
           <p:nvPr/>
         </p:nvSpPr>
@@ -25376,14 +27648,14 @@
       </p:sp>
       <p:pic>
         <p:nvPicPr>
-          <p:cNvPr id="16" name="Image 2" descr="preencoded.png">    </p:cNvPr>
+          <p:cNvPr id="20" name="Image 3" descr="preencoded.png">    </p:cNvPr>
           <p:cNvPicPr>
             <a:picLocks noChangeAspect="1"/>
           </p:cNvPicPr>
           <p:nvPr/>
         </p:nvPicPr>
         <p:blipFill>
-          <a:blip r:embed="rId3"/>
+          <a:blip r:embed="rId4"/>
           <a:stretch>
             <a:fillRect/>
           </a:stretch>
@@ -25400,7 +27672,7 @@
       </p:pic>
       <p:sp>
         <p:nvSpPr>
-          <p:cNvPr id="17" name="Text 9"/>
+          <p:cNvPr id="21" name="Text 12"/>
           <p:cNvSpPr txBox="1"/>
           <p:nvPr/>
         </p:nvSpPr>

--- a/en/slides/08-Computer_Architecture-Boolean_Algebra_1.pptx
+++ b/en/slides/08-Computer_Architecture-Boolean_Algebra_1.pptx
@@ -125,13 +125,13 @@
   <p:extLst>
     <p:ext uri="{521415D9-36F7-43E2-AB2F-B90AF26B5E84}">
       <p14:sectionLst xmlns:p14="http://schemas.microsoft.com/office/powerpoint/2010/main">
-        <p14:section name="Opening" id="{65e9965c-2d7d-b8d1-05c8-0c8501977adb}">
+        <p14:section name="Opening" id="{5c998266-e573-ff15-abfd-4babda4d05a2}">
           <p14:sldIdLst>
             <p14:sldId id="256"/>
             <p14:sldId id="257"/>
           </p14:sldIdLst>
         </p14:section>
-        <p14:section name="The computer as a logic machine" id="{2ff6de32-1c9c-774a-8614-a6132d311065}">
+        <p14:section name="The computer as a logic machine" id="{5e4ebb9f-8c2b-2d73-35b6-038e093c47b1}">
           <p14:sldIdLst>
             <p14:sldId id="258"/>
             <p14:sldId id="259"/>
@@ -140,7 +140,7 @@
             <p14:sldId id="262"/>
           </p14:sldIdLst>
         </p14:section>
-        <p14:section name="Boolean algebra" id="{5c33655b-1dcc-6ba7-2710-393e5f67dfc3}">
+        <p14:section name="Boolean algebra" id="{95d19e02-e0e3-9585-7d1a-1cb4a9731a29}">
           <p14:sldIdLst>
             <p14:sldId id="263"/>
             <p14:sldId id="264"/>
@@ -152,7 +152,7 @@
             <p14:sldId id="270"/>
           </p14:sldIdLst>
         </p14:section>
-        <p14:section name="Back to the machine" id="{e21425e4-9a82-071f-3874-b1f907948fb5}">
+        <p14:section name="Back to the machine" id="{974ec38c-2328-6419-2481-79afddbb5b7c}">
           <p14:sldIdLst>
             <p14:sldId id="271"/>
             <p14:sldId id="272"/>

--- a/en/slides/08-Computer_Architecture-Boolean_Algebra_1.pptx
+++ b/en/slides/08-Computer_Architecture-Boolean_Algebra_1.pptx
@@ -125,13 +125,13 @@
   <p:extLst>
     <p:ext uri="{521415D9-36F7-43E2-AB2F-B90AF26B5E84}">
       <p14:sectionLst xmlns:p14="http://schemas.microsoft.com/office/powerpoint/2010/main">
-        <p14:section name="Opening" id="{5c998266-e573-ff15-abfd-4babda4d05a2}">
+        <p14:section name="Opening" id="{47c27fb8-c644-00a6-bd29-17a08c30be08}">
           <p14:sldIdLst>
             <p14:sldId id="256"/>
             <p14:sldId id="257"/>
           </p14:sldIdLst>
         </p14:section>
-        <p14:section name="The computer as a logic machine" id="{5e4ebb9f-8c2b-2d73-35b6-038e093c47b1}">
+        <p14:section name="The computer as a logic machine" id="{6520027a-71d6-551d-596e-68236b4ca444}">
           <p14:sldIdLst>
             <p14:sldId id="258"/>
             <p14:sldId id="259"/>
@@ -140,7 +140,7 @@
             <p14:sldId id="262"/>
           </p14:sldIdLst>
         </p14:section>
-        <p14:section name="Boolean algebra" id="{95d19e02-e0e3-9585-7d1a-1cb4a9731a29}">
+        <p14:section name="Boolean algebra" id="{73c771d9-ae18-e6eb-2de9-3fa7cdfdd179}">
           <p14:sldIdLst>
             <p14:sldId id="263"/>
             <p14:sldId id="264"/>
@@ -152,7 +152,7 @@
             <p14:sldId id="270"/>
           </p14:sldIdLst>
         </p14:section>
-        <p14:section name="Back to the machine" id="{974ec38c-2328-6419-2481-79afddbb5b7c}">
+        <p14:section name="Back to the machine" id="{b3e1ce9e-692b-2c66-7829-ec58722f2cc2}">
           <p14:sldIdLst>
             <p14:sldId id="271"/>
             <p14:sldId id="272"/>
@@ -564,7 +564,7 @@
           <a:p>
             <a:r>
               <a:rPr lang="en-US" dirty="0"/>
-              <a:t>The second block of the course begins: logic. After learning what bits mean, you learn how they are combined. You have in fact been using Boolean algebra since the first days, every time you tested a button with andi; this lecture gives that operation a name and builds the algebra around it. The White Rabbit on the cover is always in a hurry: the processor too does everything by tiny logical steps, billions of them per second.
+              <a:t>The second block of the course opens: logic. Having established what bits mean, the course turns to how they are combined. Boolean algebra has in fact been in use since the first weeks, every time a button was tested with andi; this lecture names that operation and constructs the algebra around it. The White Rabbit on the cover, always in a hurry, is an apt emblem: the processor too accomplishes everything through minute logical steps, billions of them per second.
 Learning status: UNDERSTAND NOW, by the end of this lecture you explain it, trace it and apply it on your own; USE NOW, you follow and use the recipe today; how it works inside is explained later, or is not part of the course; UNDERSTAND LATER, recognise the name and what it is for; a later lecture explains it. A slide without a badge is context: a story, an example, a question, an exercise.
 Learning status of this lecture. UNDERSTAND NOW: bit masks; the von Neumann architecture; analysis and synthesis; Boolean algebra; logic gates. USE NOW: the complete program, the PRG32 tools (used, not studied, in this course). UNDERSTAND LATER: minimisation, Karnaugh maps (Lecture 09). A slide without a badge is context: a story, an example, a question, an exercise.
 For the lecturer: Spiral: the students have used andi to test a button since the first days. The lecture names what they did (a mask is an AND), then builds the algebra, then returns to the bitwise instructions.</a:t>
@@ -655,7 +655,7 @@
           <a:p>
             <a:r>
               <a:rPr lang="en-US" dirty="0"/>
-              <a:t>Three more gates. XOR, the exclusive or, gives 1 when the two inputs are different: it is the sum bit of a one-bit addition. NAND and NOR are AND and OR followed by a negation: the small circle on the output of a symbol always means NOT. NAND gives 0 only when both inputs are 1; NOR gives 1 only when both are 0. They matter in practice because they are the gates that are cheapest to build with transistors, as Lecture 10 will show.
+              <a:t>Three further gates. XOR, the exclusive OR, yields 1 when its inputs differ; it is the sum bit of a one-bit addition, as the warm-up of Lecture 09 shows. NAND and NOR are AND and OR followed by negation, and the small circle at the output of a symbol always denotes NOT. NAND yields 0 only when both inputs are 1; NOR yields 1 only when both are 0. Their practical importance is that they are the gates most economically built from transistors, as Lecture 10 demonstrates.
 UNDERSTAND NOW: logic gates.
 For the lecturer: New slide. XOR is 1 when the inputs differ: it is the sum bit of an addition, and RISC-V has it as an instruction. The small circle on a symbol means negation.</a:t>
             </a:r>
@@ -745,7 +745,7 @@
           <a:p>
             <a:r>
               <a:rPr lang="en-US" dirty="0"/>
-              <a:t>The first four properties, each in two forms, one for AND and one for OR. Commutative and associative are as in ordinary algebra; thanks to the second, AND and OR extend to any number of operands. Idempotence is new: x AND x is x, and x OR x is x; repeating a variable adds nothing. Absorption is the most useful for simplifying: x OR (x AND y) is simply x, because when x is 1 the result is 1 whatever y is, and when x is 0 both terms are 0.
+              <a:t>The first four properties, each stated in a form for AND and a form for OR. Commutativity and associativity hold as in ordinary algebra, and the latter allows AND and OR to be extended to any number of operands. Idempotence is new: x AND x is x, and x OR x is x; repeating a variable contributes nothing. Absorption is the most useful for simplification: x OR (x AND y) equals x, because when x is 1 the result is 1 whatever y may be, and when x is 0 both terms are 0.
 UNDERSTAND NOW: Boolean algebra.
 For the lecturer: Because of the associative property AND and OR can be defined on more than two operands: x . y . z. Every property comes in a pair: swap AND with OR.</a:t>
             </a:r>
@@ -835,7 +835,7 @@
           <a:p>
             <a:r>
               <a:rPr lang="en-US" dirty="0"/>
-              <a:t>Five more properties. The first distributive law is the familiar one. The second, x + yz = (x + y)(x + z), has no equivalent in ordinary algebra: here OR distributes over AND too. Then the constants: 1 is the identity for AND and 0 for OR; 0 annuls an AND and 1 saturates an OR. The complement laws say that a variable and its negation give 0 with AND and 1 with OR. Involution: negating twice returns the variable. Two of these, identity and null element, explain how a mask works.
+              <a:t>Five further properties. The first distributive law is the familiar one. The second, x + yz = (x + y)(x + z), has no counterpart in ordinary algebra: here OR also distributes over AND. Then the constants: 1 is the identity element for AND and 0 for OR; 0 annihilates an AND and 1 saturates an OR. The complement laws state that a variable combined with its negation gives 0 under AND and 1 under OR. Involution: double negation restores the variable. Two of these properties, identity and the null element, are precisely what makes a bit mask work.
 UNDERSTAND NOW: Boolean algebra.
 For the lecturer: The second distributive law has no counterpart in ordinary algebra. The source slide called involution 'convoluzione' and grouped identity and null element as 'minimum and maximum'; the complement laws are added here.</a:t>
             </a:r>
@@ -925,7 +925,7 @@
           <a:p>
             <a:r>
               <a:rPr lang="en-US" dirty="0"/>
-              <a:t>De Morgan's laws connect the three operations: the complement of a product is the sum of the complements, and the complement of a sum is the product of the complements. The table proves the first by perfect induction: since the variables have only two values, a law can be verified by checking every row. The two highlighted columns are identical. In terms of gates: a NAND is an OR with negated inputs. You will use these laws constantly, on paper and in programs.
+              <a:t>De Morgan's laws relate the three operations: the complement of a product is the sum of the complements, and the complement of a sum is the product of the complements. The table proves the first by perfect induction: since each variable takes only two values, a law can be established by checking every row exhaustively, and the two highlighted columns are identical. In terms of gates, a NAND is an OR with inverted inputs. These laws will be used constantly, both on paper and in programs.
 UNDERSTAND NOW: Boolean algebra.
 For the lecturer: Augustus De Morgan, 1847. The laws generalise to any number of variables. The source deck showed the proof as a picture.</a:t>
             </a:r>
@@ -1015,7 +1015,7 @@
           <a:p>
             <a:r>
               <a:rPr lang="en-US" dirty="0"/>
-              <a:t>Two general rules. Duality: every identity remains true if you swap AND with OR and 0 with 1; this is why the properties came in pairs, and it halves the work of proving them. Precedence: NOT is applied first, then AND, then OR, as powers come before products and products before sums; parentheses change the order. And a definition to remember: two expressions are equivalent when they have the same truth table.
+              <a:t>Two general principles. Duality: every identity remains valid when AND and OR are interchanged together with 0 and 1; this is why the properties appeared in pairs, and it halves the work of proving them. Precedence: NOT is applied first, then AND, then OR, just as exponentiation precedes multiplication and multiplication precedes addition; parentheses override the order. And a definition to retain: two expressions are equivalent when they have the same truth table.
 UNDERSTAND NOW: Boolean algebra.
 For the lecturer: Duality halves the work: prove one law of each pair and the other follows.</a:t>
             </a:r>
@@ -1105,7 +1105,7 @@
           <a:p>
             <a:r>
               <a:rPr lang="en-US" dirty="0"/>
-              <a:t>The algebra at work. The expression xy + xy' needs two AND gates, an OR and an inverter. Collecting x with the distributive law gives x(y + y'); the complement law turns the parenthesis into 1; the identity law leaves x. Three gates have become a piece of wire. Each line of the table names the law that justifies it: when you simplify, always be able to say which law you are applying. The caption shows a second simplification that will be used again.
+              <a:t>The algebra at work. The expression xy + xy' requires two AND gates, an OR gate and an inverter. Factoring x by the distributive law gives x(y + y'); the complement law reduces the parenthesis to 1; the identity law leaves x. Four gates have become a wire. Each line of the derivation names the law that justifies it, and this discipline should be adopted: in a simplification, every step must be attributable to a law. The caption shows a second simplification that will recur in Lecture 09.
 UNDERSTAND NOW: Boolean algebra.
 For the lecturer: Two literals and three gates become a wire. The identity in the caption (sometimes called the simplification theorem) uses the distributive law of OR over AND; it is used again in Lecture 09.</a:t>
             </a:r>
@@ -1195,8 +1195,8 @@
           <a:p>
             <a:r>
               <a:rPr lang="en-US" dirty="0"/>
-              <a:t>NAND is AND followed by NOT. Start from AND: for which single row of its table is the output 1? That is the only row in which NAND is 0.
-Apply the first law of De Morgan to the product of a and b': the complement becomes the sum of the complements, a' plus the complement of b'. Then use involution on the second term.
+              <a:t>For the first question, NAND is AND followed by NOT. Starting from AND, one identifies the single row of its table whose output is 1; that is the only row in which NAND yields 0.
+For the second, the first of De Morgan's laws is applied to the product of a and b': the complement becomes the sum of the complements, a' plus the complement of b'. Involution then simplifies the second term.
 For the lecturer: 1. Answer: C. NAND is the complement of AND: it is 0 only when both inputs are 1.
 2. Answer: B. (a . b')' = a' + (b')' = a' + b, using involution on the second term.</a:t>
             </a:r>
@@ -1286,8 +1286,8 @@
           <a:p>
             <a:r>
               <a:rPr lang="en-US" dirty="0"/>
-              <a:t>Write 0x5A in binary, 0101 1010, and the mask 0x0F, 0000 1111. The AND keeps the bits where the mask has 1, the low four, and clears the others.
-Compare the four instructions with the table of the mask. AND with 0x20 would clear all the other bits. XOR would invert the bit, turning a 1 into a 0. An arithmetic addition would work only if the bit was 0, and would produce a carry otherwise. Only OR sets the bit and leaves the rest unchanged.
+              <a:t>For the first question, 0x5A is written in binary, 0101 1010, and the mask 0x0F as 0000 1111. The AND retains the bits where the mask has a 1, the low four, and clears the rest.
+For the second, the four instructions are compared against the table of mask operations. AND with 0x20 would clear every other bit; XOR would invert the bit, turning a 1 into a 0; an arithmetic addition would work only if the bit were 0, and would otherwise propagate a carry. Only OR sets the bit while leaving all others unchanged.
 For the lecturer: 1. Answer: C. 0x5A = 0101 1010; AND with 0000 1111 keeps the low nibble: 1010 = 0xA.
 2. Answer: B. OR with a mask: x + 1 = 1 on bit 5, x + 0 = x elsewhere. xori would toggle it; addi would carry into bit 6 if the bit was already 1.</a:t>
             </a:r>
@@ -1377,7 +1377,7 @@
           <a:p>
             <a:r>
               <a:rPr lang="en-US" dirty="0"/>
-              <a:t>Twelve terms. Truth table is the table that defines a function by listing all cases. Logical product and logical sum are AND and OR. To set, to clear and to toggle a bit mean to put it to 1, to put it to 0 and to invert it; Italian has no single verbs for them and uses short phrases.</a:t>
+              <a:t>Twelve terms. The truth table defines a function by exhaustive enumeration of its cases. Logical product and logical sum are AND and OR. To set, to clear and to toggle a bit mean to make it 1, to make it 0 and to invert it; Italian has no single verbs for these and uses short phrases.</a:t>
             </a:r>
             <a:endParaRPr lang="en-US" dirty="0"/>
           </a:p>
@@ -1465,7 +1465,7 @@
           <a:p>
             <a:r>
               <a:rPr lang="en-US" dirty="0"/>
-              <a:t>Four conclusions. The von Neumann architecture describes a real machine in simplified form. Boolean algebra describes logic functions that electronic circuits can implement. Three operations, a few properties and De Morgan's laws are enough to transform any expression. And a bitwise instruction is the algebra applied to thirty-two bits at once, with the mask as the identity law at work. The next lecture goes from operators to functions: canonical forms and minimisation.
+              <a:t>Four conclusions. The von Neumann architecture describes a real machine in simplified form. Boolean algebra describes the logical functions that electronic circuits implement. Three operations, a handful of properties and De Morgan's laws suffice to transform any expression. And a bitwise instruction is the algebra applied to thirty-two bits in parallel, with the mask as the identity and null-element laws at work. The next lecture passes from operators to functions: canonical forms and minimisation.
 Learning status, recap. UNDERSTAND NOW: bit masks; the von Neumann architecture; analysis and synthesis; Boolean algebra; logic gates. USE NOW: the complete program, the PRG32 tools (used, not studied, in this course). UNDERSTAND LATER: minimisation, Karnaugh maps (Lecture 09). A slide without a badge is context: a story, an example, a question, an exercise.
 For the lecturer: Next lecture: Boolean functions, canonical forms and minimisation.</a:t>
             </a:r>
@@ -1555,7 +1555,7 @@
           <a:p>
             <a:r>
               <a:rPr lang="en-US" dirty="0"/>
-              <a:t>Five objectives. Describe a computer as three subsystems connected by a bus. Distinguish the two problems of logic design, analysis and synthesis. Write the truth tables and recognise the symbols of six gates. Apply the properties of the algebra, including De Morgan's laws, to simplify an expression. And, back on the machine, use the bitwise instructions of RISC-V to test, set, clear and toggle single bits of a register.</a:t>
+              <a:t>Five learning outcomes. Describing a computer as three subsystems connected by a bus. Distinguishing the two fundamental problems of logic design, analysis and synthesis. Writing the truth tables of six gates and recognising their symbols. Applying the properties of the algebra, De Morgan's laws included, to simplify an expression. And, returning to the machine, using the bitwise instructions of RISC-V to test, set, clear and toggle individual bits of a register.</a:t>
             </a:r>
             <a:endParaRPr lang="en-US" dirty="0"/>
           </a:p>
@@ -1643,7 +1643,7 @@
           <a:p>
             <a:r>
               <a:rPr lang="en-US" dirty="0"/>
-              <a:t>A computer has three subsystems: the processor, which executes instructions; the main memory, which holds instructions and data; and input/output, which connects the machine to the world. They are joined by a bus, a set of shared wires divided into address lines, data lines and control lines. It is the von Neumann model of Lecture 03 in today's terms. Everything that travels on the bus is a pattern of bits. On the ESP32-C6 all of this is inside one chip.
+              <a:t>A computer comprises three subsystems: the processor, which executes instructions; the main memory, which holds instructions and data; and the input/output subsystem, which connects the machine to the world. They communicate through a bus, a set of shared lines divided into address lines, data lines and control lines. This is the von Neumann model of Lecture 03 expressed in contemporary terms. Everything that travels on the bus is a pattern of bits. On the ESP32-C6 all three subsystems reside on a single chip.
 UNDERSTAND NOW: the von Neumann architecture.
 For the lecturer: Replaces the two pictures of the source deck (von Neumann model; architecture with bus). On the ESP32-C6 the three subsystems and the bus are all inside one chip.</a:t>
             </a:r>
@@ -1733,7 +1733,7 @@
           <a:p>
             <a:r>
               <a:rPr lang="en-US" dirty="0"/>
-              <a:t>The processor is where the processing capability resides. It executes instructions, which are explicit commands of two kinds: those that govern the transfer of information, inside the computer and to and from the devices, and those that specify arithmetic and logic operations. The memory holds the data and the sequence of instructions, and a sequence of instructions stored in memory is a program. The processor does one thing for ever: it fetches an instruction, executes it, and repeats.
+              <a:t>The processor is where the capacity for computation resides. It executes instructions, explicit commands of two kinds: those that govern the transfer of information, within the computer and between it and its devices, and those that specify arithmetic and logical operations. Memory holds both the data and the sequence of instructions, and a sequence of instructions stored in memory is a program. The processor performs a single activity indefinitely: it fetches an instruction, executes it, and repeats. Lecture 19 examines this cycle in detail.
 UNDERSTAND NOW: the von Neumann architecture.
 For the lecturer: RV32I: about forty instructions. You have used addi, lw, sw, andi, beqz, call and ret: transfer, arithmetic, logic and control are all there.</a:t>
             </a:r>
@@ -1823,7 +1823,7 @@
           <a:p>
             <a:r>
               <a:rPr lang="en-US" dirty="0"/>
-              <a:t>Four adjectives define an electronic computer. Numeric, or digital: all the information is strings of bits. Automatic: once started it proceeds by itself. Stored-program: the program is in memory and can be replaced, so the same machine does different jobs. Electronic: it is built from circuits that store and process bits. Each adjective excludes something: an abacus is numeric but not automatic; a mechanical music box is automatic but its program is fixed.
+              <a:t>Four attributes characterise an electronic computer. Numeric, or digital: all information is represented as strings of bits. Automatic: once started, it proceeds without intervention. Stored-program: the program resides in memory and can be replaced, so the same machine performs different tasks. Electronic: it is built from circuits that store and process bits. Each attribute excludes something: an abacus is numeric but not automatic; a mechanical music box is automatic but its program is fixed.
 UNDERSTAND NOW: the von Neumann architecture.</a:t>
             </a:r>
             <a:endParaRPr lang="en-US" dirty="0"/>
@@ -1912,7 +1912,7 @@
           <a:p>
             <a:r>
               <a:rPr lang="en-US" dirty="0"/>
-              <a:t>The circuits that store and process bits are called switching circuits, or logic circuits; connected together they form a switching network, and designing one is logic design. To describe what such circuits do we use an algebra. It plays for circuits the role that ordinary algebra plays for quantities: a notation in which you can calculate instead of trying every case. The values are two, 0 and 1: two voltage levels, two states of a switch.
+              <a:t>The circuits that store and process bits are called switching circuits, or logic circuits; interconnected, they form a switching network, and their design is called logic design. Describing their behaviour requires an algebra, which plays for circuits the role that ordinary algebra plays for quantities: a notation in which one can calculate rather than enumerate every case. The values are two, 0 and 1, corresponding physically to two voltage levels or two states of a switch, a correspondence that Lecture 10 makes precise.
 UNDERSTAND NOW: analysis and synthesis.
 For the lecturer: Switching circuits: circuiti di commutazione. The algebra is Boole's (1854), applied to switches by Nakajima and Shannon in the 1930s (Lecture 03).</a:t>
             </a:r>
@@ -2002,7 +2002,7 @@
           <a:p>
             <a:r>
               <a:rPr lang="en-US" dirty="0"/>
-              <a:t>Two problems, and one algebra for both. Analysis: you are given the structure of a circuit, how it is made, and you must find its behaviour, what it does. Reading andi t3, t0, 1 and saying what ends up in t3 is analysis. Synthesis goes the other way: from a desired behaviour to a structure that realises it, for example from the table of a sum to an adder. Synthesis usually has many solutions; choosing the cheapest is the subject of the next lecture.
+              <a:t>Two problems, addressed by one algebra. Analysis: given the structure of a circuit, how it is built, determine its behaviour, what it computes. Reading andi t3, t0, 1 and stating what t3 will contain is analysis. Synthesis proceeds in the opposite direction: from a specified behaviour to a structure that realises it, for example from the table of a sum to an adder. Analysis has a unique answer; synthesis in general has many, and choosing the least costly among them is the minimisation problem treated in Lecture 09.
 UNDERSTAND NOW: analysis and synthesis. UNDERSTAND LATER: minimisation, Karnaugh maps (studied in Lecture 09).
 For the lecturer: Synthesis usually has many solutions; choosing the cheapest is the minimisation problem of Lecture 09.</a:t>
             </a:r>
@@ -2092,7 +2092,7 @@
           <a:p>
             <a:r>
               <a:rPr lang="en-US" dirty="0"/>
-              <a:t>In Boolean algebra a variable can take only two values, 0 and 1, and there are three basic operations. AND, the logical product, written with a dot or by simply putting the variables side by side. OR, the logical sum, written with a plus sign. NOT, the complement, written here with a prime, as in x', so that it can be typed. Do not be misled by the symbols: the plus is not an arithmetic sum, as you will see at once in the truth table of OR.
+              <a:t>In Boolean algebra a variable takes only two values, 0 and 1, and there are three fundamental operations. AND, the logical product, written with a dot or by juxtaposition. OR, the logical sum, written with a plus sign. NOT, the complement, written here with a prime, as x', for ease of typing. The notation should not mislead: the plus sign does not denote arithmetic addition, as the truth table of OR immediately shows.
 UNDERSTAND NOW: Boolean algebra.
 For the lecturer: Conjunction, disjunction, negation: congiunzione, disgiunzione, negazione. In these slides the complement is written with a prime (x') so that it can be typed.</a:t>
             </a:r>
@@ -2182,7 +2182,7 @@
           <a:p>
             <a:r>
               <a:rPr lang="en-US" dirty="0"/>
-              <a:t>Each panel shows an operation in three ways: the symbol of the gate, the notation and the truth table, which lists the output for every combination of the inputs. AND gives 1 only when both inputs are 1. OR gives 0 only when both inputs are 0, so 1 OR 1 is 1, not 2. NOT has one input and inverts it. Learn the three shapes: a flat back and a round front for AND, a curved back and a pointed front for OR, a triangle with a small circle for NOT.
+              <a:t>Each panel presents an operation in three forms: the symbol of the gate, the algebraic notation, and the truth table, which lists the output for every combination of inputs. AND yields 1 only when both inputs are 1. OR yields 0 only when both inputs are 0, so 1 OR 1 equals 1, not 2. NOT has a single input and inverts it. The three shapes should be learned: a flat back and rounded front for AND, a curved back and pointed front for OR, a triangle with a small circle for NOT.
 UNDERSTAND NOW: logic gates.
 For the lecturer: AND is 1 only when both inputs are 1; OR is 0 only when both inputs are 0; NOT inverts. A truth table lists the output for every combination of the inputs.</a:t>
             </a:r>
@@ -3262,7 +3262,7 @@
                 <a:ea typeface="Calibri" pitchFamily="34" charset="-122"/>
                 <a:cs typeface="Calibri" pitchFamily="34" charset="-120"/>
               </a:rPr>
-              <a:t>08-Computer_Architecture-Boolean_Algebra_1-Code.pptx</a:t>
+              <a:t>08-Computer_Architecture-Boolean_Algebra_1-Lab.pptx</a:t>
             </a:r>
             <a:endParaRPr lang="en-US" sz="1300" dirty="0"/>
           </a:p>

--- a/en/slides/08-Computer_Architecture-Boolean_Algebra_1.pptx
+++ b/en/slides/08-Computer_Architecture-Boolean_Algebra_1.pptx
@@ -125,13 +125,13 @@
   <p:extLst>
     <p:ext uri="{521415D9-36F7-43E2-AB2F-B90AF26B5E84}">
       <p14:sectionLst xmlns:p14="http://schemas.microsoft.com/office/powerpoint/2010/main">
-        <p14:section name="Opening" id="{47c27fb8-c644-00a6-bd29-17a08c30be08}">
+        <p14:section name="Opening" id="{dc84ead3-4cc0-d51d-2da5-1ff769545d9b}">
           <p14:sldIdLst>
             <p14:sldId id="256"/>
             <p14:sldId id="257"/>
           </p14:sldIdLst>
         </p14:section>
-        <p14:section name="The computer as a logic machine" id="{6520027a-71d6-551d-596e-68236b4ca444}">
+        <p14:section name="The computer as a logic machine" id="{cc00dba2-ac48-a03b-dfa0-a61d3d9cec10}">
           <p14:sldIdLst>
             <p14:sldId id="258"/>
             <p14:sldId id="259"/>
@@ -140,7 +140,7 @@
             <p14:sldId id="262"/>
           </p14:sldIdLst>
         </p14:section>
-        <p14:section name="Boolean algebra" id="{73c771d9-ae18-e6eb-2de9-3fa7cdfdd179}">
+        <p14:section name="Boolean algebra" id="{72f35e6a-351e-cd12-8a50-9cecd861aabd}">
           <p14:sldIdLst>
             <p14:sldId id="263"/>
             <p14:sldId id="264"/>
@@ -152,7 +152,7 @@
             <p14:sldId id="270"/>
           </p14:sldIdLst>
         </p14:section>
-        <p14:section name="Back to the machine" id="{b3e1ce9e-692b-2c66-7829-ec58722f2cc2}">
+        <p14:section name="Back to the machine" id="{52cc07b3-fcd8-7cad-8324-72e54c9321f1}">
           <p14:sldIdLst>
             <p14:sldId id="271"/>
             <p14:sldId id="272"/>

--- a/en/slides/08-Computer_Architecture-Boolean_Algebra_1.pptx
+++ b/en/slides/08-Computer_Architecture-Boolean_Algebra_1.pptx
@@ -125,13 +125,13 @@
   <p:extLst>
     <p:ext uri="{521415D9-36F7-43E2-AB2F-B90AF26B5E84}">
       <p14:sectionLst xmlns:p14="http://schemas.microsoft.com/office/powerpoint/2010/main">
-        <p14:section name="Opening" id="{dc84ead3-4cc0-d51d-2da5-1ff769545d9b}">
+        <p14:section name="Opening" id="{0de59794-a6b9-73ba-23ec-527ba919ab03}">
           <p14:sldIdLst>
             <p14:sldId id="256"/>
             <p14:sldId id="257"/>
           </p14:sldIdLst>
         </p14:section>
-        <p14:section name="The computer as a logic machine" id="{cc00dba2-ac48-a03b-dfa0-a61d3d9cec10}">
+        <p14:section name="The computer as a logic machine" id="{f6a7b77c-7cef-c903-d602-c16ce0069a06}">
           <p14:sldIdLst>
             <p14:sldId id="258"/>
             <p14:sldId id="259"/>
@@ -140,7 +140,7 @@
             <p14:sldId id="262"/>
           </p14:sldIdLst>
         </p14:section>
-        <p14:section name="Boolean algebra" id="{72f35e6a-351e-cd12-8a50-9cecd861aabd}">
+        <p14:section name="Boolean algebra" id="{50d85ace-16fb-5073-7b7d-a9479b21556b}">
           <p14:sldIdLst>
             <p14:sldId id="263"/>
             <p14:sldId id="264"/>
@@ -152,7 +152,7 @@
             <p14:sldId id="270"/>
           </p14:sldIdLst>
         </p14:section>
-        <p14:section name="Back to the machine" id="{52cc07b3-fcd8-7cad-8324-72e54c9321f1}">
+        <p14:section name="Back to the machine" id="{7b1d96bc-8340-012d-604a-0cf8c64ee2d1}">
           <p14:sldIdLst>
             <p14:sldId id="271"/>
             <p14:sldId id="272"/>
@@ -567,6 +567,7 @@
               <a:t>The second block of the course opens: logic. Having established what bits mean, the course turns to how they are combined. Boolean algebra has in fact been in use since the first weeks, every time a button was tested with andi; this lecture names that operation and constructs the algebra around it. The White Rabbit on the cover, always in a hurry, is an apt emblem: the processor too accomplishes everything through minute logical steps, billions of them per second.
 Learning status: UNDERSTAND NOW, by the end of this lecture you explain it, trace it and apply it on your own; USE NOW, you follow and use the recipe today; how it works inside is explained later, or is not part of the course; UNDERSTAND LATER, recognise the name and what it is for; a later lecture explains it. A slide without a badge is context: a story, an example, a question, an exercise.
 Learning status of this lecture. UNDERSTAND NOW: bit masks; the von Neumann architecture; analysis and synthesis; Boolean algebra; logic gates. USE NOW: the complete program, the PRG32 tools (used, not studied, in this course). UNDERSTAND LATER: minimisation, Karnaugh maps (Lecture 09). A slide without a badge is context: a story, an example, a question, an exercise.
+Roadmap. Today's outcomes: (1) tell the analysis of a logic circuit from its synthesis; (2) apply the axioms and theorems of Boolean algebra, De Morgan's included; (3) set, clear and test bits with masks. Builds on: the von Neumann architecture (Lecture 03). Next: Lecture 09, Elements of Boolean Algebra.
 For the lecturer: Spiral: the students have used andi to test a button since the first days. The lecture names what they did (a mask is an AND), then builds the algebra, then returns to the bitwise instructions.</a:t>
             </a:r>
             <a:endParaRPr lang="en-US" dirty="0"/>
@@ -1466,7 +1467,7 @@
             <a:r>
               <a:rPr lang="en-US" dirty="0"/>
               <a:t>Four conclusions. The von Neumann architecture describes a real machine in simplified form. Boolean algebra describes the logical functions that electronic circuits implement. Three operations, a handful of properties and De Morgan's laws suffice to transform any expression. And a bitwise instruction is the algebra applied to thirty-two bits in parallel, with the mask as the identity and null-element laws at work. The next lecture passes from operators to functions: canonical forms and minimisation.
-Learning status, recap. UNDERSTAND NOW: bit masks; the von Neumann architecture; analysis and synthesis; Boolean algebra; logic gates. USE NOW: the complete program, the PRG32 tools (used, not studied, in this course). UNDERSTAND LATER: minimisation, Karnaugh maps (Lecture 09). A slide without a badge is context: a story, an example, a question, an exercise.
+Learning status, recap. UNDERSTAND NOW: bit masks; the von Neumann architecture; analysis and synthesis; Boolean algebra; logic gates. USE NOW: the complete program, the PRG32 tools (used, not studied, in this course). UNDERSTAND LATER: minimisation, Karnaugh maps (Lecture 09). A slide without a badge is context: a story, an example, a question, an exercise. Closing thread: andi t3, t0, 1 is a row of 32 AND gates: Boolean algebra describes both the instruction and the circuit. Next: from a truth table to the smallest circuit. Exit ticket (two to four minutes, alone, on paper): 1. Analysis or synthesis? (a) Given a schematic, find its truth table. (b) Given 'the light is on when exactly one of two switches is up', build a circuit. (c) Read andi t3, t0, 1 and say what ends up in t3. 2. Write one instruction that sets bit 3 of t0 to 1 and leaves the other bits unchanged, and one that clears it.
 For the lecturer: Next lecture: Boolean functions, canonical forms and minimisation.</a:t>
             </a:r>
             <a:endParaRPr lang="en-US" dirty="0"/>
